--- a/Semestralni_prace_Tym10.pptx
+++ b/Semestralni_prace_Tym10.pptx
@@ -3921,7 +3921,7 @@
                 </a:solidFill>
                 <a:latin typeface="Aptos"/>
               </a:rPr>
-              <a:t>TÝM 10</a:t>
+              <a:t>TEAM 10</a:t>
             </a:r>
           </a:p>
         </p:txBody>
@@ -3966,7 +3966,7 @@
                 </a:solidFill>
                 <a:latin typeface="Aptos Display"/>
               </a:rPr>
-              <a:t>Nadměrné spoléhání</a:t>
+              <a:t>Overreliance on AI</a:t>
             </a:r>
           </a:p>
           <a:p>
@@ -3988,7 +3988,7 @@
                 </a:solidFill>
                 <a:latin typeface="Aptos Display"/>
               </a:rPr>
-              <a:t>na AI při studiu</a:t>
+              <a:t>in Learning</a:t>
             </a:r>
           </a:p>
         </p:txBody>
@@ -4033,7 +4033,7 @@
                 </a:solidFill>
                 <a:latin typeface="Aptos"/>
               </a:rPr>
-              <a:t>Kdy AI pomáhá — a kdy nahrazuje vlastní myšlení?</a:t>
+              <a:t>When does AI help — and when does it replace independent thinking?</a:t>
             </a:r>
           </a:p>
         </p:txBody>
@@ -4113,7 +4113,7 @@
                 </a:solidFill>
                 <a:latin typeface="Aptos"/>
               </a:rPr>
-              <a:t>Semestrální projekt  ·  Řešení problémů  ·  FIS VŠE</a:t>
+              <a:t>Semester project  ·  Problem Solving  ·  FIS, Prague University of Economics and Business</a:t>
             </a:r>
           </a:p>
         </p:txBody>
@@ -4152,23 +4152,8 @@
                 </a:solidFill>
                 <a:latin typeface="Aptos"/>
               </a:rPr>
-              <a:t>Adrian  ·  Juraj  ·  Honza  ·  Martin  ·  Adriana</a:t>
-            </a:r>
-            <a:r>
-              <a:rPr lang="cs-CZ" sz="1150" noProof="0" dirty="0">
-                <a:solidFill>
-                  <a:srgbClr val="A6BED7"/>
-                </a:solidFill>
-                <a:latin typeface="Aptos"/>
-              </a:rPr>
-              <a:t> ·  Simona</a:t>
-            </a:r>
-            <a:endParaRPr lang="cs-CZ" sz="1150" b="0" i="0" noProof="0" dirty="0">
-              <a:solidFill>
-                <a:srgbClr val="A6BED7"/>
-              </a:solidFill>
-              <a:latin typeface="Aptos"/>
-            </a:endParaRPr>
+              <a:t>Adrian  ·  Juraj  ·  Jan  ·  Martin  ·  Adriana ·  Simona</a:t>
+            </a:r>
           </a:p>
         </p:txBody>
       </p:sp>
@@ -4212,7 +4197,7 @@
                 </a:solidFill>
                 <a:latin typeface="Aptos"/>
               </a:rPr>
-              <a:t>2026  /  TÝM 10</a:t>
+              <a:t>2026  /  TEAM 10</a:t>
             </a:r>
           </a:p>
         </p:txBody>
@@ -4379,7 +4364,7 @@
                 </a:solidFill>
                 <a:latin typeface="Aptos Display"/>
               </a:rPr>
-              <a:t>Doporučené řešení: AI Study Smart</a:t>
+              <a:t>Recommended solution: AI Study Smart</a:t>
             </a:r>
           </a:p>
         </p:txBody>
@@ -4424,7 +4409,7 @@
                 </a:solidFill>
                 <a:latin typeface="Aptos"/>
               </a:rPr>
-              <a:t>Kombinujeme tři varianty postupně, protože žádná jednotlivá možnost neřeší problém sama.</a:t>
+              <a:t>We combine three options in stages because no single option can address the problem on its own.</a:t>
             </a:r>
           </a:p>
         </p:txBody>
@@ -4636,7 +4621,7 @@
                 </a:solidFill>
                 <a:latin typeface="Aptos"/>
               </a:rPr>
-              <a:t>ZKUS SÁM  →  PTEJ SE NA NÁPOVĚDU  →  VYŘEŠ  →  OVĚŘ</a:t>
+              <a:t>TRY  →  ASK FOR A HINT  →  SOLVE  →  VERIFY</a:t>
             </a:r>
           </a:p>
         </p:txBody>
@@ -4771,7 +4756,7 @@
                 </a:solidFill>
                 <a:latin typeface="Aptos"/>
               </a:rPr>
-              <a:t>KRÁTKODOBĚ  ·  PRŮVODCE</a:t>
+              <a:t>SHORT TERM  ·  STUDY GUIDE</a:t>
             </a:r>
           </a:p>
         </p:txBody>
@@ -4816,7 +4801,7 @@
                 </a:solidFill>
                 <a:latin typeface="Aptos"/>
               </a:rPr>
-              <a:t>Jedna strana s pravidlem 4 kroků a vzorovými prompty.</a:t>
+              <a:t>A one-page guide to the four-step rule, with example prompts.</a:t>
             </a:r>
           </a:p>
           <a:p>
@@ -4857,25 +4842,7 @@
                 </a:solidFill>
                 <a:latin typeface="Aptos"/>
               </a:rPr>
-              <a:t>Distribuce přes </a:t>
-            </a:r>
-            <a:r>
-              <a:rPr lang="cs-CZ" sz="1080" b="0" i="0" noProof="0" dirty="0" err="1">
-                <a:solidFill>
-                  <a:srgbClr val="283442"/>
-                </a:solidFill>
-                <a:latin typeface="Aptos"/>
-              </a:rPr>
-              <a:t>InSIS</a:t>
-            </a:r>
-            <a:r>
-              <a:rPr lang="cs-CZ" sz="1080" b="0" i="0" noProof="0" dirty="0">
-                <a:solidFill>
-                  <a:srgbClr val="283442"/>
-                </a:solidFill>
-                <a:latin typeface="Aptos"/>
-              </a:rPr>
-              <a:t> a na cvičeních.</a:t>
+              <a:t>Distributed through InSIS and in classes.</a:t>
             </a:r>
           </a:p>
           <a:p>
@@ -4916,7 +4883,7 @@
                 </a:solidFill>
                 <a:latin typeface="Aptos"/>
               </a:rPr>
-              <a:t>Cíl: průvodce dostupný prvákům do 2 týdnů.</a:t>
+              <a:t>Goal: make the guide available to first-year students within two weeks.</a:t>
             </a:r>
           </a:p>
         </p:txBody>
@@ -5051,7 +5018,7 @@
                 </a:solidFill>
                 <a:latin typeface="Aptos"/>
               </a:rPr>
-              <a:t>STŘEDNĚDOBĚ  ·  WORKSHOP</a:t>
+              <a:t>MEDIUM TERM  ·  WORKSHOP</a:t>
             </a:r>
           </a:p>
         </p:txBody>
@@ -5096,7 +5063,7 @@
                 </a:solidFill>
                 <a:latin typeface="Aptos"/>
               </a:rPr>
-              <a:t>Praktické cvičení na reálné úloze: hotová odpověď vs. nápověda.</a:t>
+              <a:t>A practical exercise using a real task: a finished answer versus a hint.</a:t>
             </a:r>
           </a:p>
           <a:p>
@@ -5137,7 +5104,7 @@
                 </a:solidFill>
                 <a:latin typeface="Aptos"/>
               </a:rPr>
-              <a:t>Krátký workshop a zpětná vazba.</a:t>
+              <a:t>A short workshop followed by feedback.</a:t>
             </a:r>
           </a:p>
           <a:p>
@@ -5178,7 +5145,7 @@
                 </a:solidFill>
                 <a:latin typeface="Aptos"/>
               </a:rPr>
-              <a:t>Cíl: ≥ 70 % účastníků hodnotí workshop jako užitečný.</a:t>
+              <a:t>Goal: ≥ 70% of participants rate the workshop as useful.</a:t>
             </a:r>
           </a:p>
         </p:txBody>
@@ -5313,7 +5280,7 @@
                 </a:solidFill>
                 <a:latin typeface="Aptos"/>
               </a:rPr>
-              <a:t>DLOUHODOBĚ  ·  HODNOCENÍ</a:t>
+              <a:t>LONG TERM  ·  ASSESSMENT</a:t>
             </a:r>
           </a:p>
         </p:txBody>
@@ -5358,7 +5325,7 @@
                 </a:solidFill>
                 <a:latin typeface="Aptos"/>
               </a:rPr>
-              <a:t>Ve spolupráci s FIS upravit vybrané úlohy tak, aby ověřovaly vlastní postup.</a:t>
+              <a:t>Work with FIS to adapt selected assignments so they assess students’ own reasoning.</a:t>
             </a:r>
           </a:p>
           <a:p>
@@ -5399,7 +5366,7 @@
                 </a:solidFill>
                 <a:latin typeface="Aptos"/>
               </a:rPr>
-              <a:t>Např. krátká ústní obhajoba nebo podobná úloha bez AI.</a:t>
+              <a:t>For example, a short oral explanation or a similar task completed without AI.</a:t>
             </a:r>
           </a:p>
           <a:p>
@@ -5440,7 +5407,7 @@
                 </a:solidFill>
                 <a:latin typeface="Aptos"/>
               </a:rPr>
-              <a:t>Cíl: pilot alespoň v jednom předmětu 1. ročníku.</a:t>
+              <a:t>Goal: pilot the approach in at least one first-year course.</a:t>
             </a:r>
           </a:p>
         </p:txBody>
@@ -5531,7 +5498,7 @@
                 </a:solidFill>
                 <a:latin typeface="Aptos"/>
               </a:rPr>
-              <a:t>PROČ TATO KOMBINACE?</a:t>
+              <a:t>WHY THIS COMBINATION?</a:t>
             </a:r>
           </a:p>
         </p:txBody>
@@ -5576,7 +5543,7 @@
                 </a:solidFill>
                 <a:latin typeface="Aptos"/>
               </a:rPr>
-              <a:t>Průvodce je rychlý a škálovatelný; workshop učí postup prakticky; změna hodnocení dlouhodoběji podporuje vlastní porozumění. Pilot umožní ověřit přijetí i užitečnost před širším zavedením.</a:t>
+              <a:t>The guide is quick to distribute and scalable; the workshop teaches the approach in practice; assessment changes support independent understanding over the longer term. A pilot will help evaluate acceptance and usefulness before wider implementation.</a:t>
             </a:r>
           </a:p>
         </p:txBody>
@@ -5656,7 +5623,7 @@
                 </a:solidFill>
                 <a:latin typeface="Aptos"/>
               </a:rPr>
-              <a:t>TÝM 10  ·  ŘEŠENÍ PROBLÉMŮ  ·  FIS VŠE  ·  OBSAH 9/10</a:t>
+              <a:t>TEAM 10  ·  PROBLEM SOLVING  ·  FIS, VŠE  ·  CONTENT 9/10</a:t>
             </a:r>
           </a:p>
         </p:txBody>
@@ -5701,7 +5668,7 @@
                 </a:solidFill>
                 <a:latin typeface="Aptos"/>
               </a:rPr>
-              <a:t>Výchozí důkazy: [2, 3] · cíle jsou návrhy, nikoli dosažené výsledky.</a:t>
+              <a:t>Supporting evidence: [2, 3] · goals are proposals, not achieved results.</a:t>
             </a:r>
           </a:p>
         </p:txBody>
@@ -5868,7 +5835,7 @@
                 </a:solidFill>
                 <a:latin typeface="Aptos Display"/>
               </a:rPr>
-              <a:t>Jak řešení otestujeme a poznáme, zda funguje?</a:t>
+              <a:t>How will we test the solution and determine whether it works?</a:t>
             </a:r>
           </a:p>
         </p:txBody>
@@ -5913,7 +5880,7 @@
                 </a:solidFill>
                 <a:latin typeface="Aptos"/>
               </a:rPr>
-              <a:t>Postupné pilotování omezuje náklady a umožňuje upravit návrh podle zpětné vazby.</a:t>
+              <a:t>A phased pilot limits costs and allows the proposal to be refined based on feedback.</a:t>
             </a:r>
           </a:p>
         </p:txBody>
@@ -6171,7 +6138,7 @@
                 </a:solidFill>
                 <a:latin typeface="Aptos"/>
               </a:rPr>
-              <a:t>1  ·  PŘIPRAVIT PRŮVODCE</a:t>
+              <a:t>1  ·  PREPARE THE GUIDE</a:t>
             </a:r>
           </a:p>
         </p:txBody>
@@ -6216,7 +6183,7 @@
                 </a:solidFill>
                 <a:latin typeface="Aptos"/>
               </a:rPr>
-              <a:t>Otestovat text s malou skupinou, představit na cvičení.</a:t>
+              <a:t>Test the text with a small group and introduce it during a class.</a:t>
             </a:r>
           </a:p>
           <a:p>
@@ -6238,7 +6205,7 @@
                 </a:solidFill>
                 <a:latin typeface="Aptos"/>
               </a:rPr>
-              <a:t>Odpovědnost: tým + vyučující.</a:t>
+              <a:t>Responsibility: team + instructor.</a:t>
             </a:r>
           </a:p>
         </p:txBody>
@@ -6373,7 +6340,7 @@
                 </a:solidFill>
                 <a:latin typeface="Aptos"/>
               </a:rPr>
-              <a:t>2  ·  OTESTOVAT WORKSHOP</a:t>
+              <a:t>2  ·  TEST THE WORKSHOP</a:t>
             </a:r>
           </a:p>
         </p:txBody>
@@ -6418,7 +6385,7 @@
                 </a:solidFill>
                 <a:latin typeface="Aptos"/>
               </a:rPr>
-              <a:t>Zařadit do cvičení, použít reálnou úlohu a krátký dotazník.</a:t>
+              <a:t>Include it in a class, use a real task, and collect feedback with a short questionnaire.</a:t>
             </a:r>
           </a:p>
           <a:p>
@@ -6440,7 +6407,7 @@
                 </a:solidFill>
                 <a:latin typeface="Aptos"/>
               </a:rPr>
-              <a:t>Odpovědnost: tým + vyučující / spolek.</a:t>
+              <a:t>Responsibility: team + instructor / student association.</a:t>
             </a:r>
           </a:p>
         </p:txBody>
@@ -6575,7 +6542,7 @@
                 </a:solidFill>
                 <a:latin typeface="Aptos"/>
               </a:rPr>
-              <a:t>3  ·  NAVRHNOUT PILOT HODNOCENÍ</a:t>
+              <a:t>3  ·  DESIGN AN ASSESSMENT PILOT</a:t>
             </a:r>
           </a:p>
         </p:txBody>
@@ -6620,7 +6587,7 @@
                 </a:solidFill>
                 <a:latin typeface="Aptos"/>
               </a:rPr>
-              <a:t>Vybrat jeden předmět a spolu s vyučujícím navrhnout úlohu.</a:t>
+              <a:t>Select one course and design a task together with the instructor.</a:t>
             </a:r>
           </a:p>
           <a:p>
@@ -6642,7 +6609,7 @@
                 </a:solidFill>
                 <a:latin typeface="Aptos"/>
               </a:rPr>
-              <a:t>Odpovědnost: vyučující + FIS.</a:t>
+              <a:t>Responsibility: instructor + FIS.</a:t>
             </a:r>
           </a:p>
         </p:txBody>
@@ -6777,7 +6744,7 @@
                 </a:solidFill>
                 <a:latin typeface="Aptos"/>
               </a:rPr>
-              <a:t>RIZIKA A OPATŘENÍ</a:t>
+              <a:t>RISKS AND RESPONSES</a:t>
             </a:r>
           </a:p>
         </p:txBody>
@@ -6822,7 +6789,7 @@
                 </a:solidFill>
                 <a:latin typeface="Aptos"/>
               </a:rPr>
-              <a:t>• Nízká účast → zařadit workshop do běžného cvičení.</a:t>
+              <a:t>• Low attendance → include the workshop in a regular class.</a:t>
             </a:r>
           </a:p>
           <a:p>
@@ -6844,17 +6811,43 @@
                 </a:solidFill>
                 <a:latin typeface="Aptos"/>
               </a:rPr>
-              <a:t>• Průvodce studenti ignorují → sdílet jej přes </a:t>
-            </a:r>
-            <a:r>
-              <a:rPr lang="cs-CZ" sz="1050" b="0" i="0" noProof="0" dirty="0" err="1">
+              <a:t>• Students ignore the guide → share it through InSIS and use it in class.</a:t>
+            </a:r>
+          </a:p>
+          <a:p>
+            <a:pPr algn="l">
+              <a:lnSpc>
+                <a:spcPct val="100000"/>
+              </a:lnSpc>
+              <a:spcBef>
+                <a:spcPts val="0"/>
+              </a:spcBef>
+              <a:spcAft>
+                <a:spcPts val="300"/>
+              </a:spcAft>
+            </a:pPr>
+            <a:r>
+              <a:rPr lang="cs-CZ" sz="1050" b="0" i="0" noProof="0" dirty="0">
                 <a:solidFill>
                   <a:srgbClr val="283442"/>
                 </a:solidFill>
                 <a:latin typeface="Aptos"/>
               </a:rPr>
-              <a:t>InSIS</a:t>
-            </a:r>
+              <a:t>• Resistance to assessment changes → start with a small pilot in one course.</a:t>
+            </a:r>
+          </a:p>
+          <a:p>
+            <a:pPr algn="l">
+              <a:lnSpc>
+                <a:spcPct val="100000"/>
+              </a:lnSpc>
+              <a:spcBef>
+                <a:spcPts val="0"/>
+              </a:spcBef>
+              <a:spcAft>
+                <a:spcPts val="300"/>
+              </a:spcAft>
+            </a:pPr>
             <a:r>
               <a:rPr lang="cs-CZ" sz="1050" b="0" i="0" noProof="0" dirty="0">
                 <a:solidFill>
@@ -6862,51 +6855,7 @@
                 </a:solidFill>
                 <a:latin typeface="Aptos"/>
               </a:rPr>
-              <a:t> a použít v praxi.</a:t>
-            </a:r>
-          </a:p>
-          <a:p>
-            <a:pPr algn="l">
-              <a:lnSpc>
-                <a:spcPct val="100000"/>
-              </a:lnSpc>
-              <a:spcBef>
-                <a:spcPts val="0"/>
-              </a:spcBef>
-              <a:spcAft>
-                <a:spcPts val="300"/>
-              </a:spcAft>
-            </a:pPr>
-            <a:r>
-              <a:rPr lang="cs-CZ" sz="1050" b="0" i="0" noProof="0" dirty="0">
-                <a:solidFill>
-                  <a:srgbClr val="283442"/>
-                </a:solidFill>
-                <a:latin typeface="Aptos"/>
-              </a:rPr>
-              <a:t>• Odpor ke změně hodnocení → začít malým pilotem v jednom předmětu.</a:t>
-            </a:r>
-          </a:p>
-          <a:p>
-            <a:pPr algn="l">
-              <a:lnSpc>
-                <a:spcPct val="100000"/>
-              </a:lnSpc>
-              <a:spcBef>
-                <a:spcPts val="0"/>
-              </a:spcBef>
-              <a:spcAft>
-                <a:spcPts val="300"/>
-              </a:spcAft>
-            </a:pPr>
-            <a:r>
-              <a:rPr lang="cs-CZ" sz="1050" b="0" i="0" noProof="0" dirty="0">
-                <a:solidFill>
-                  <a:srgbClr val="283442"/>
-                </a:solidFill>
-                <a:latin typeface="Aptos"/>
-              </a:rPr>
-              <a:t>• Chování se obtížně měří → kombinovat dotazník a úlohu bez AI.</a:t>
+              <a:t>• Behaviour is difficult to measure → combine a questionnaire with a task completed without AI.</a:t>
             </a:r>
           </a:p>
         </p:txBody>
@@ -7041,7 +6990,7 @@
                 </a:solidFill>
                 <a:latin typeface="Aptos"/>
               </a:rPr>
-              <a:t>JAK POZNÁME ÚSPĚCH?  ·  KPI</a:t>
+              <a:t>HOW WILL WE MEASURE SUCCESS?  ·  KPIs</a:t>
             </a:r>
           </a:p>
         </p:txBody>
@@ -7086,7 +7035,7 @@
                 </a:solidFill>
                 <a:latin typeface="Aptos"/>
               </a:rPr>
-              <a:t>• Zapojení: počet studentů, kteří použijí průvodce/workshop.</a:t>
+              <a:t>• Participation: number of students who use the guide / attend the workshop.</a:t>
             </a:r>
           </a:p>
           <a:p>
@@ -7108,7 +7057,7 @@
                 </a:solidFill>
                 <a:latin typeface="Aptos"/>
               </a:rPr>
-              <a:t>• Užitečnost: ≥ 70 % účastníků hodnotí materiál jako užitečný.</a:t>
+              <a:t>• Usefulness: ≥ 70% of participants rate the material as useful.</a:t>
             </a:r>
           </a:p>
           <a:p>
@@ -7130,7 +7079,7 @@
                 </a:solidFill>
                 <a:latin typeface="Aptos"/>
               </a:rPr>
-              <a:t>• Změna návyků: častější využití nápověd a ověřování místo hotových odpovědí.</a:t>
+              <a:t>• Change in habits: more frequent use of hints and verification instead of finished answers.</a:t>
             </a:r>
           </a:p>
           <a:p>
@@ -7152,7 +7101,7 @@
                 </a:solidFill>
                 <a:latin typeface="Aptos"/>
               </a:rPr>
-              <a:t>• Systémová změna: alespoň 1 pilotní předmět ověřuje samostatné porozumění.</a:t>
+              <a:t>• System-level change: at least one pilot course assesses independent understanding.</a:t>
             </a:r>
           </a:p>
         </p:txBody>
@@ -7197,7 +7146,7 @@
                 </a:solidFill>
                 <a:latin typeface="Aptos"/>
               </a:rPr>
-              <a:t>Uvedené cíle jsou plánované ukazatele. Výsledek se má měřit po pilotu, ne předpokládat předem.</a:t>
+              <a:t>These are planned indicators. Outcomes should be measured after the pilot, not assumed in advance.</a:t>
             </a:r>
           </a:p>
         </p:txBody>
@@ -7277,7 +7226,7 @@
                 </a:solidFill>
                 <a:latin typeface="Aptos"/>
               </a:rPr>
-              <a:t>TÝM 10  ·  ŘEŠENÍ PROBLÉMŮ  ·  FIS VŠE  ·  OBSAH 10/10</a:t>
+              <a:t>TEAM 10  ·  PROBLEM SOLVING  ·  FIS, VŠE  ·  CONTENT 10/10</a:t>
             </a:r>
           </a:p>
         </p:txBody>
@@ -7399,7 +7348,7 @@
                 </a:solidFill>
                 <a:latin typeface="Aptos"/>
               </a:rPr>
-              <a:t>ZÁVĚR</a:t>
+              <a:t>CONCLUSION</a:t>
             </a:r>
           </a:p>
         </p:txBody>
@@ -7444,7 +7393,7 @@
                 </a:solidFill>
                 <a:latin typeface="Aptos Display"/>
               </a:rPr>
-              <a:t>AI nemá nahrazovat vlastní učení.</a:t>
+              <a:t>AI should not replace learning.</a:t>
             </a:r>
           </a:p>
           <a:p>
@@ -7466,7 +7415,7 @@
                 </a:solidFill>
                 <a:latin typeface="Aptos Display"/>
               </a:rPr>
-              <a:t>Má studentům pomáhat lépe přemýšlet.</a:t>
+              <a:t>It should help students think better.</a:t>
             </a:r>
           </a:p>
         </p:txBody>
@@ -7511,7 +7460,7 @@
                 </a:solidFill>
                 <a:latin typeface="Aptos"/>
               </a:rPr>
-              <a:t>Od rychlé pomoci k dlouhodobé změně návyků:</a:t>
+              <a:t>From quick assistance to long-term changes in habits:</a:t>
             </a:r>
           </a:p>
         </p:txBody>
@@ -7602,7 +7551,7 @@
                 </a:solidFill>
                 <a:latin typeface="Aptos"/>
               </a:rPr>
-              <a:t>PRŮVODCE</a:t>
+              <a:t>STUDY GUIDE</a:t>
             </a:r>
           </a:p>
         </p:txBody>
@@ -7647,7 +7596,7 @@
                 </a:solidFill>
                 <a:latin typeface="Aptos"/>
               </a:rPr>
-              <a:t>Dostupná podpora</a:t>
+              <a:t>Accessible support</a:t>
             </a:r>
           </a:p>
         </p:txBody>
@@ -7783,7 +7732,7 @@
                 </a:solidFill>
                 <a:latin typeface="Aptos"/>
               </a:rPr>
-              <a:t>Praktický nácvik</a:t>
+              <a:t>Hands-on practice</a:t>
             </a:r>
           </a:p>
         </p:txBody>
@@ -7874,7 +7823,7 @@
                 </a:solidFill>
                 <a:latin typeface="Aptos"/>
               </a:rPr>
-              <a:t>ZMĚNA HODNOCENÍ</a:t>
+              <a:t>ASSESSMENT DESIGN</a:t>
             </a:r>
           </a:p>
         </p:txBody>
@@ -7919,7 +7868,7 @@
                 </a:solidFill>
                 <a:latin typeface="Aptos"/>
               </a:rPr>
-              <a:t>Samostatné porozumění</a:t>
+              <a:t>Independent understanding</a:t>
             </a:r>
           </a:p>
         </p:txBody>
@@ -7964,7 +7913,7 @@
                 </a:solidFill>
                 <a:latin typeface="Aptos"/>
               </a:rPr>
-              <a:t>Návrh nejprve pilotně ověříme a rozšíříme až podle výsledků.</a:t>
+              <a:t>We will test the proposal in a pilot first and scale it up only based on the results.</a:t>
             </a:r>
           </a:p>
         </p:txBody>
@@ -8175,7 +8124,7 @@
                 </a:solidFill>
                 <a:latin typeface="Aptos Display"/>
               </a:rPr>
-              <a:t>Děkujeme za pozornost</a:t>
+              <a:t>Thank you for your attention</a:t>
             </a:r>
           </a:p>
         </p:txBody>
@@ -8220,7 +8169,7 @@
                 </a:solidFill>
                 <a:latin typeface="Aptos"/>
               </a:rPr>
-              <a:t>Rádi odpovíme na vaše otázky a připomínky.</a:t>
+              <a:t>We welcome your questions and feedback.</a:t>
             </a:r>
           </a:p>
         </p:txBody>
@@ -8300,7 +8249,7 @@
                 </a:solidFill>
                 <a:latin typeface="Aptos"/>
               </a:rPr>
-              <a:t>TÝM 10  ·  ŘEŠENÍ PROBLÉMŮ  ·  FIS VŠE</a:t>
+              <a:t>TEAM 10  ·  PROBLEM SOLVING  ·  FIS, VŠE</a:t>
             </a:r>
           </a:p>
         </p:txBody>
@@ -8473,7 +8422,7 @@
                 </a:solidFill>
                 <a:latin typeface="Aptos Display"/>
               </a:rPr>
-              <a:t>Co ukázal náš dotazník?</a:t>
+              <a:t>What did our questionnaire reveal?</a:t>
             </a:r>
           </a:p>
         </p:txBody>
@@ -8518,7 +8467,7 @@
                 </a:solidFill>
                 <a:latin typeface="Aptos"/>
               </a:rPr>
-              <a:t>Anonymní dotazník mezi prváky FIS · n = 23 · vlastní průzkum týmu 10</a:t>
+              <a:t>Anonymous questionnaire among first-year FIS students · n = 23 · Team 10 survey</a:t>
             </a:r>
           </a:p>
         </p:txBody>
@@ -8822,7 +8771,7 @@
                 </a:solidFill>
                 <a:latin typeface="Aptos"/>
               </a:rPr>
-              <a:t>AI používají k vyhledávání informací</a:t>
+              <a:t>Use AI to search for information</a:t>
             </a:r>
           </a:p>
         </p:txBody>
@@ -9003,7 +8952,7 @@
                 </a:solidFill>
                 <a:latin typeface="Aptos"/>
               </a:rPr>
-              <a:t>AI používají při školních projektech</a:t>
+              <a:t>Use AI for school projects</a:t>
             </a:r>
           </a:p>
         </p:txBody>
@@ -9184,7 +9133,7 @@
                 </a:solidFill>
                 <a:latin typeface="Aptos"/>
               </a:rPr>
-              <a:t>uvádí úsporu času a snazší práci</a:t>
+              <a:t>report time savings and easier work</a:t>
             </a:r>
           </a:p>
         </p:txBody>
@@ -9365,7 +9314,7 @@
                 </a:solidFill>
                 <a:latin typeface="Aptos"/>
               </a:rPr>
-              <a:t>AI používají na triviální úkoly velmi často nebo občas</a:t>
+              <a:t>Use AI for trivial tasks very often or occasionally</a:t>
             </a:r>
           </a:p>
         </p:txBody>
@@ -9546,7 +9495,7 @@
                 </a:solidFill>
                 <a:latin typeface="Aptos"/>
               </a:rPr>
-              <a:t>říká, že AI někdy pomáhá a jindy nahrazuje vlastní práci</a:t>
+              <a:t>Say AI sometimes supports learning and sometimes replaces their own work</a:t>
             </a:r>
           </a:p>
         </p:txBody>
@@ -9727,54 +9676,8 @@
                 </a:solidFill>
                 <a:latin typeface="Aptos"/>
               </a:rPr>
-              <a:t>kontroluje správnost odpovědí na stupni 3–4 z 5</a:t>
-            </a:r>
-          </a:p>
-        </p:txBody>
-      </p:sp>
-      <p:sp>
-        <p:nvSpPr>
-          <p:cNvPr id="33" name="Rounded Rectangle 32"/>
-          <p:cNvSpPr/>
-          <p:nvPr/>
-        </p:nvSpPr>
-        <p:spPr>
-          <a:xfrm>
-            <a:off x="585216" y="4882896"/>
-            <a:ext cx="11045952" cy="795528"/>
-          </a:xfrm>
-          <a:prstGeom prst="roundRect">
-            <a:avLst/>
-          </a:prstGeom>
-          <a:solidFill>
-            <a:srgbClr val="FCF6EB"/>
-          </a:solidFill>
-          <a:ln w="10160">
-            <a:solidFill>
-              <a:srgbClr val="EFDCB8"/>
-            </a:solidFill>
-          </a:ln>
-        </p:spPr>
-        <p:style>
-          <a:lnRef idx="1">
-            <a:schemeClr val="accent1"/>
-          </a:lnRef>
-          <a:fillRef idx="3">
-            <a:schemeClr val="accent1"/>
-          </a:fillRef>
-          <a:effectRef idx="2">
-            <a:schemeClr val="accent1"/>
-          </a:effectRef>
-          <a:fontRef idx="minor">
-            <a:schemeClr val="lt1"/>
-          </a:fontRef>
-        </p:style>
-        <p:txBody>
-          <a:bodyPr rtlCol="0" anchor="ctr"/>
-          <a:lstStyle/>
-          <a:p>
-            <a:pPr algn="ctr"/>
-            <a:endParaRPr lang="cs-CZ" noProof="0" dirty="0"/>
+              <a:t>Check the accuracy of answers at level 3–4 out of 5</a:t>
+            </a:r>
           </a:p>
         </p:txBody>
       </p:sp>
@@ -9831,7 +9734,7 @@
         </p:nvSpPr>
         <p:spPr>
           <a:xfrm>
-            <a:off x="2304288" y="4983480"/>
+            <a:off x="2020824" y="5029199"/>
             <a:ext cx="9006840" cy="420624"/>
           </a:xfrm>
           <a:prstGeom prst="rect">
@@ -9863,7 +9766,7 @@
                 </a:solidFill>
                 <a:latin typeface="Aptos"/>
               </a:rPr>
-              <a:t>vnímají zhoršení samostatného a kritického myšlení stupněm 4–5 z 5.</a:t>
+              <a:t>perceive a decline in independent and critical thinking at level 4–5 out of 5.</a:t>
             </a:r>
           </a:p>
         </p:txBody>
@@ -9908,25 +9811,7 @@
                 </a:solidFill>
                 <a:latin typeface="Aptos"/>
               </a:rPr>
-              <a:t>Interpretace: data naznačují rizikové vzorce používání, ale neprokazují, že AI skutečně zhoršila schopnosti studentů. Malý </a:t>
-            </a:r>
-            <a:r>
-              <a:rPr lang="cs-CZ" sz="930" b="0" i="0" noProof="0" dirty="0" err="1">
-                <a:solidFill>
-                  <a:srgbClr val="667585"/>
-                </a:solidFill>
-                <a:latin typeface="Aptos"/>
-              </a:rPr>
-              <a:t>samovýběrový</a:t>
-            </a:r>
-            <a:r>
-              <a:rPr lang="cs-CZ" sz="930" b="0" i="0" noProof="0" dirty="0">
-                <a:solidFill>
-                  <a:srgbClr val="667585"/>
-                </a:solidFill>
-                <a:latin typeface="Aptos"/>
-              </a:rPr>
-              <a:t> vzorek není reprezentativní.</a:t>
+              <a:t>Interpretation: the data suggest potentially risky usage patterns, but do not prove that AI has actually weakened students’ abilities. The small self-selected sample is not representative.</a:t>
             </a:r>
           </a:p>
         </p:txBody>
@@ -10000,7 +9885,7 @@
                 </a:solidFill>
                 <a:latin typeface="Aptos"/>
               </a:rPr>
-              <a:t>TÝM 10  ·  ZÁLOŽNÍ SLIDE  ·  ZOBRAZIT POUZE PŘI DISKUSI</a:t>
+              <a:t>TEAM 10  ·  BACKUP SLIDE  ·  SHOW ONLY IF NEEDED FOR DISCUSSION</a:t>
             </a:r>
           </a:p>
         </p:txBody>
@@ -10045,25 +9930,7 @@
                 </a:solidFill>
                 <a:latin typeface="Aptos"/>
               </a:rPr>
-              <a:t>Zdroj: Team 10 </a:t>
-            </a:r>
-            <a:r>
-              <a:rPr lang="cs-CZ" sz="720" b="0" i="0" noProof="0" dirty="0" err="1">
-                <a:solidFill>
-                  <a:srgbClr val="667585"/>
-                </a:solidFill>
-                <a:latin typeface="Aptos"/>
-              </a:rPr>
-              <a:t>questionnaire</a:t>
-            </a:r>
-            <a:r>
-              <a:rPr lang="cs-CZ" sz="720" b="0" i="0" noProof="0" dirty="0">
-                <a:solidFill>
-                  <a:srgbClr val="667585"/>
-                </a:solidFill>
-                <a:latin typeface="Aptos"/>
-              </a:rPr>
-              <a:t> (2026), n = 23.</a:t>
+              <a:t>Source: Team 10 questionnaire (2026), n = 23.</a:t>
             </a:r>
           </a:p>
         </p:txBody>
@@ -10230,7 +10097,7 @@
                 </a:solidFill>
                 <a:latin typeface="Aptos Display"/>
               </a:rPr>
-              <a:t>Podrobné výsledky dotazníku</a:t>
+              <a:t>Detailed questionnaire results</a:t>
             </a:r>
           </a:p>
         </p:txBody>
@@ -10275,7 +10142,7 @@
                 </a:solidFill>
                 <a:latin typeface="Aptos"/>
               </a:rPr>
-              <a:t>n = 23 · otázky s více odpověďmi umožňovaly vybrat více možností.</a:t>
+              <a:t>n = 23 · questions allowing multiple answers permitted respondents to select more than one option.</a:t>
             </a:r>
           </a:p>
         </p:txBody>
@@ -10533,7 +10400,7 @@
                 </a:solidFill>
                 <a:latin typeface="Aptos"/>
               </a:rPr>
-              <a:t>NEJČASTĚJŠÍ ÚČELY POUŽITÍ AI</a:t>
+              <a:t>MOST COMMON USES OF AI</a:t>
             </a:r>
           </a:p>
         </p:txBody>
@@ -10578,7 +10445,7 @@
                 </a:solidFill>
                 <a:latin typeface="Aptos"/>
               </a:rPr>
-              <a:t>Vyhledávání informací  20/23 (87 %)</a:t>
+              <a:t>Information search  20/23 (87%)</a:t>
             </a:r>
           </a:p>
           <a:p>
@@ -10600,7 +10467,7 @@
                 </a:solidFill>
                 <a:latin typeface="Aptos"/>
               </a:rPr>
-              <a:t>Školní projekty  19/23 (83 %)</a:t>
+              <a:t>School projects  19/23 (83%)</a:t>
             </a:r>
           </a:p>
           <a:p>
@@ -10622,7 +10489,7 @@
                 </a:solidFill>
                 <a:latin typeface="Aptos"/>
               </a:rPr>
-              <a:t>Debugging kódu  17/23 (74 %)</a:t>
+              <a:t>Code debugging  17/23 (74%)</a:t>
             </a:r>
           </a:p>
           <a:p>
@@ -10644,7 +10511,7 @@
                 </a:solidFill>
                 <a:latin typeface="Aptos"/>
               </a:rPr>
-              <a:t>Psaní e-mailů / zpráv  14/23 (61 %)</a:t>
+              <a:t>Writing emails / messages  14/23 (61%)</a:t>
             </a:r>
           </a:p>
           <a:p>
@@ -10666,7 +10533,7 @@
                 </a:solidFill>
                 <a:latin typeface="Aptos"/>
               </a:rPr>
-              <a:t>Generování kódu  13/23 (57 %)</a:t>
+              <a:t>Code generation  13/23 (57%)</a:t>
             </a:r>
           </a:p>
           <a:p>
@@ -10688,7 +10555,7 @@
                 </a:solidFill>
                 <a:latin typeface="Aptos"/>
               </a:rPr>
-              <a:t>Shrnutí textů / videí  12/23 (52 %)</a:t>
+              <a:t>Summarizing texts / videos  12/23 (52%)</a:t>
             </a:r>
           </a:p>
         </p:txBody>
@@ -10823,7 +10690,7 @@
                 </a:solidFill>
                 <a:latin typeface="Aptos"/>
               </a:rPr>
-              <a:t>DŮVODY POUŽÍVÁNÍ AI PŘI STUDIU</a:t>
+              <a:t>REASONS FOR USING AI IN STUDY</a:t>
             </a:r>
           </a:p>
         </p:txBody>
@@ -10868,7 +10735,7 @@
                 </a:solidFill>
                 <a:latin typeface="Aptos"/>
               </a:rPr>
-              <a:t>Úspora času a snazší práce  16/23 (70 %)</a:t>
+              <a:t>Time savings and easier work  16/23 (70%)</a:t>
             </a:r>
           </a:p>
           <a:p>
@@ -10890,7 +10757,7 @@
                 </a:solidFill>
                 <a:latin typeface="Aptos"/>
               </a:rPr>
-              <a:t>Pomáhá pochopit látku  14/23 (61 %)</a:t>
+              <a:t>Helps understand the material  14/23 (61%)</a:t>
             </a:r>
           </a:p>
           <a:p>
@@ -10912,7 +10779,7 @@
                 </a:solidFill>
                 <a:latin typeface="Aptos"/>
               </a:rPr>
-              <a:t>Nevím, kde začít / jak řešit  9/23 (39 %)</a:t>
+              <a:t>Not knowing where to start / how to solve it  9/23 (39%)</a:t>
             </a:r>
           </a:p>
           <a:p>
@@ -10934,7 +10801,7 @@
                 </a:solidFill>
                 <a:latin typeface="Aptos"/>
               </a:rPr>
-              <a:t>Velké množství úkolů / termíny  6/23 (26 %)</a:t>
+              <a:t>Large workload / deadlines  6/23 (26%)</a:t>
             </a:r>
           </a:p>
           <a:p>
@@ -10956,7 +10823,7 @@
                 </a:solidFill>
                 <a:latin typeface="Aptos"/>
               </a:rPr>
-              <a:t>Hotová odpověď je jednodušší  4/23 (17 %)</a:t>
+              <a:t>A ready-made answer is easier  4/23 (17%)</a:t>
             </a:r>
           </a:p>
           <a:p>
@@ -10978,7 +10845,7 @@
                 </a:solidFill>
                 <a:latin typeface="Aptos"/>
               </a:rPr>
-              <a:t>Zvyk / pohodlnost  4/23 (17 %)</a:t>
+              <a:t>Habit / convenience  4/23 (17%)</a:t>
             </a:r>
           </a:p>
         </p:txBody>
@@ -11113,7 +10980,7 @@
                 </a:solidFill>
                 <a:latin typeface="Aptos"/>
               </a:rPr>
-              <a:t>TRIVIÁLNÍ ÚKOLY A STUDIUM</a:t>
+              <a:t>TRIVIAL TASKS AND STUDY</a:t>
             </a:r>
           </a:p>
         </p:txBody>
@@ -11158,7 +11025,7 @@
                 </a:solidFill>
                 <a:latin typeface="Aptos"/>
               </a:rPr>
-              <a:t>Triviální úkoly: velmi často 4, občas 8, výjimečně 8, vůbec 3.</a:t>
+              <a:t>Trivial tasks: very often 4, occasionally 8, rarely 8, never 3.</a:t>
             </a:r>
           </a:p>
           <a:p>
@@ -11180,7 +11047,7 @@
                 </a:solidFill>
                 <a:latin typeface="Aptos"/>
               </a:rPr>
-              <a:t>Při studiu: pomoc s porozuměním 10; půl na půl 12; AI k učení nepoužívám 1.</a:t>
+              <a:t>For studying: help with understanding 10; both help and replacement 12; do not use AI for learning 1.</a:t>
             </a:r>
           </a:p>
         </p:txBody>
@@ -11315,7 +11182,7 @@
                 </a:solidFill>
                 <a:latin typeface="Aptos"/>
               </a:rPr>
-              <a:t>OVĚŘOVÁNÍ A VNÍMANÝ DOPAD</a:t>
+              <a:t>VERIFICATION AND PERCEIVED IMPACT</a:t>
             </a:r>
           </a:p>
         </p:txBody>
@@ -11360,7 +11227,7 @@
                 </a:solidFill>
                 <a:latin typeface="Aptos"/>
               </a:rPr>
-              <a:t>Ověřování (1 = vždy, 5 = nikdy): 1 → 0; 2 → 11; 3 → 7; 4 → 5; 5 → 0.</a:t>
+              <a:t>Verification (1 = always, 5 = never): 1 → 0; 2 → 11; 3 → 7; 4 → 5; 5 → 0.</a:t>
             </a:r>
           </a:p>
           <a:p>
@@ -11382,7 +11249,7 @@
                 </a:solidFill>
                 <a:latin typeface="Aptos"/>
               </a:rPr>
-              <a:t>Vnímaný dopad na kritické myšlení (1 = vůbec, 5 = rozhodně): 1 → 4; 2 → 4; 3 → 9; 4 → 5; 5 → 1.</a:t>
+              <a:t>Perceived impact on critical thinking (1 = not at all, 5 = definitely): 1 → 4; 2 → 4; 3 → 9; 4 → 5; 5 → 1.</a:t>
             </a:r>
           </a:p>
         </p:txBody>
@@ -11427,25 +11294,7 @@
                 </a:solidFill>
                 <a:latin typeface="Aptos"/>
               </a:rPr>
-              <a:t>Pozor: jde o malý </a:t>
-            </a:r>
-            <a:r>
-              <a:rPr lang="cs-CZ" sz="910" b="0" i="0" noProof="0" dirty="0" err="1">
-                <a:solidFill>
-                  <a:srgbClr val="667585"/>
-                </a:solidFill>
-                <a:latin typeface="Aptos"/>
-              </a:rPr>
-              <a:t>samovýběrový</a:t>
-            </a:r>
-            <a:r>
-              <a:rPr lang="cs-CZ" sz="910" b="0" i="0" noProof="0" dirty="0">
-                <a:solidFill>
-                  <a:srgbClr val="667585"/>
-                </a:solidFill>
-                <a:latin typeface="Aptos"/>
-              </a:rPr>
-              <a:t> vzorek, který neumožňuje zobecnit výsledky na všechny prváky FIS.</a:t>
+              <a:t>Note: this is a small self-selected sample, so the results cannot be generalized to all first-year FIS students.</a:t>
             </a:r>
           </a:p>
         </p:txBody>
@@ -11525,7 +11374,7 @@
                 </a:solidFill>
                 <a:latin typeface="Aptos"/>
               </a:rPr>
-              <a:t>TÝM 10  ·  ZÁLOŽNÍ SLIDE  ·  ZOBRAZIT POUZE PŘI DISKUSI</a:t>
+              <a:t>TEAM 10  ·  BACKUP SLIDE  ·  SHOW ONLY IF NEEDED FOR DISCUSSION</a:t>
             </a:r>
           </a:p>
         </p:txBody>
@@ -11692,7 +11541,7 @@
                 </a:solidFill>
                 <a:latin typeface="Aptos Display"/>
               </a:rPr>
-              <a:t>Rozšířený registr rizik doporučeného řešení</a:t>
+              <a:t>Extended risk register for the proposed solution</a:t>
             </a:r>
           </a:p>
         </p:txBody>
@@ -11737,25 +11586,7 @@
                 </a:solidFill>
                 <a:latin typeface="Aptos"/>
               </a:rPr>
-              <a:t>P a D jsou týmové odhady na stupnici 1–5; hodnoty po </a:t>
-            </a:r>
-            <a:r>
-              <a:rPr lang="cs-CZ" sz="1150" b="0" i="0" noProof="0" dirty="0" err="1">
-                <a:solidFill>
-                  <a:srgbClr val="667585"/>
-                </a:solidFill>
-                <a:latin typeface="Aptos"/>
-              </a:rPr>
-              <a:t>mitigaci</a:t>
-            </a:r>
-            <a:r>
-              <a:rPr lang="cs-CZ" sz="1150" b="0" i="0" noProof="0" dirty="0">
-                <a:solidFill>
-                  <a:srgbClr val="667585"/>
-                </a:solidFill>
-                <a:latin typeface="Aptos"/>
-              </a:rPr>
-              <a:t> nejsou měřené.</a:t>
+              <a:t>P and I are team estimates on a 1–5 scale; post-mitigation values have not been measured.</a:t>
             </a:r>
           </a:p>
         </p:txBody>
@@ -11969,7 +11800,7 @@
                 </a:solidFill>
                 <a:latin typeface="Aptos"/>
               </a:rPr>
-              <a:t>RIZIKO</a:t>
+              <a:t>RISK</a:t>
             </a:r>
           </a:p>
         </p:txBody>
@@ -12060,7 +11891,7 @@
                 </a:solidFill>
                 <a:latin typeface="Aptos"/>
               </a:rPr>
-              <a:t>CO SE MŮŽE STÁT</a:t>
+              <a:t>WHAT COULD HAPPEN</a:t>
             </a:r>
           </a:p>
         </p:txBody>
@@ -12242,7 +12073,7 @@
                 </a:solidFill>
                 <a:latin typeface="Aptos"/>
               </a:rPr>
-              <a:t>D</a:t>
+              <a:t>I</a:t>
             </a:r>
           </a:p>
         </p:txBody>
@@ -12333,7 +12164,7 @@
                 </a:solidFill>
                 <a:latin typeface="Aptos"/>
               </a:rPr>
-              <a:t>P×D</a:t>
+              <a:t>P×I</a:t>
             </a:r>
           </a:p>
         </p:txBody>
@@ -12424,7 +12255,7 @@
                 </a:solidFill>
                 <a:latin typeface="Aptos"/>
               </a:rPr>
-              <a:t>MITIGAČNÍ OPATŘENÍ</a:t>
+              <a:t>MITIGATION MEASURES</a:t>
             </a:r>
           </a:p>
         </p:txBody>
@@ -12515,7 +12346,7 @@
                 </a:solidFill>
                 <a:latin typeface="Aptos"/>
               </a:rPr>
-              <a:t>Nízké používání průvodce</a:t>
+              <a:t>Low uptake of the guide</a:t>
             </a:r>
           </a:p>
         </p:txBody>
@@ -12606,7 +12437,7 @@
                 </a:solidFill>
                 <a:latin typeface="Aptos"/>
               </a:rPr>
-              <a:t>Materiál zůstane nepovšimnutý</a:t>
+              <a:t>The material may go unnoticed</a:t>
             </a:r>
           </a:p>
         </p:txBody>
@@ -12879,7 +12710,7 @@
                 </a:solidFill>
                 <a:latin typeface="Aptos"/>
               </a:rPr>
-              <a:t>12 · V</a:t>
+              <a:t>12 · H</a:t>
             </a:r>
           </a:p>
         </p:txBody>
@@ -12970,25 +12801,7 @@
                 </a:solidFill>
                 <a:latin typeface="Aptos"/>
               </a:rPr>
-              <a:t>Představit ho na cvičení, sdílet přes </a:t>
-            </a:r>
-            <a:r>
-              <a:rPr lang="cs-CZ" sz="910" b="0" i="0" noProof="0" dirty="0" err="1">
-                <a:solidFill>
-                  <a:srgbClr val="283442"/>
-                </a:solidFill>
-                <a:latin typeface="Aptos"/>
-              </a:rPr>
-              <a:t>InSIS</a:t>
-            </a:r>
-            <a:r>
-              <a:rPr lang="cs-CZ" sz="910" b="0" i="0" noProof="0" dirty="0">
-                <a:solidFill>
-                  <a:srgbClr val="283442"/>
-                </a:solidFill>
-                <a:latin typeface="Aptos"/>
-              </a:rPr>
-              <a:t>, přidat konkrétní prompty.</a:t>
+              <a:t>Introduce it in class, share it through InSIS, and include specific prompts.</a:t>
             </a:r>
           </a:p>
         </p:txBody>
@@ -13079,7 +12892,7 @@
                 </a:solidFill>
                 <a:latin typeface="Aptos"/>
               </a:rPr>
-              <a:t>Nízká účast na workshopu</a:t>
+              <a:t>Low workshop attendance</a:t>
             </a:r>
           </a:p>
         </p:txBody>
@@ -13170,7 +12983,7 @@
                 </a:solidFill>
                 <a:latin typeface="Aptos"/>
               </a:rPr>
-              <a:t>Studenti nepřijdou na samostatnou akci</a:t>
+              <a:t>Students may not attend a standalone event</a:t>
             </a:r>
           </a:p>
         </p:txBody>
@@ -13443,7 +13256,7 @@
                 </a:solidFill>
                 <a:latin typeface="Aptos"/>
               </a:rPr>
-              <a:t>9 · S</a:t>
+              <a:t>9 · M</a:t>
             </a:r>
           </a:p>
         </p:txBody>
@@ -13534,7 +13347,7 @@
                 </a:solidFill>
                 <a:latin typeface="Aptos"/>
               </a:rPr>
-              <a:t>Zařadit workshop přímo do běžného cvičení.</a:t>
+              <a:t>Include the workshop directly in a regular class.</a:t>
             </a:r>
           </a:p>
         </p:txBody>
@@ -13625,7 +13438,7 @@
                 </a:solidFill>
                 <a:latin typeface="Aptos"/>
               </a:rPr>
-              <a:t>Malý přenos do praxe</a:t>
+              <a:t>Limited transfer to practice</a:t>
             </a:r>
           </a:p>
         </p:txBody>
@@ -13716,7 +13529,7 @@
                 </a:solidFill>
                 <a:latin typeface="Aptos"/>
               </a:rPr>
-              <a:t>Po workshopu se návyky nezmění</a:t>
+              <a:t>Habits may not change after the workshop</a:t>
             </a:r>
           </a:p>
         </p:txBody>
@@ -13989,7 +13802,7 @@
                 </a:solidFill>
                 <a:latin typeface="Aptos"/>
               </a:rPr>
-              <a:t>12 · V</a:t>
+              <a:t>12 · H</a:t>
             </a:r>
           </a:p>
         </p:txBody>
@@ -14080,7 +13893,7 @@
                 </a:solidFill>
                 <a:latin typeface="Aptos"/>
               </a:rPr>
-              <a:t>Po dvou týdnech krátce ověřit využití a upravit materiály.</a:t>
+              <a:t>Check usage after two weeks and adjust the materials.</a:t>
             </a:r>
           </a:p>
         </p:txBody>
@@ -14171,7 +13984,7 @@
                 </a:solidFill>
                 <a:latin typeface="Aptos"/>
               </a:rPr>
-              <a:t>Nízká podpora vyučujících</a:t>
+              <a:t>Limited instructor support</a:t>
             </a:r>
           </a:p>
         </p:txBody>
@@ -14262,7 +14075,7 @@
                 </a:solidFill>
                 <a:latin typeface="Aptos"/>
               </a:rPr>
-              <a:t>Změna hodnocení se nezavede</a:t>
+              <a:t>Assessment changes may not be adopted</a:t>
             </a:r>
           </a:p>
         </p:txBody>
@@ -14535,7 +14348,7 @@
                 </a:solidFill>
                 <a:latin typeface="Aptos"/>
               </a:rPr>
-              <a:t>16 · K</a:t>
+              <a:t>16 · C</a:t>
             </a:r>
           </a:p>
         </p:txBody>
@@ -14626,7 +14439,7 @@
                 </a:solidFill>
                 <a:latin typeface="Aptos"/>
               </a:rPr>
-              <a:t>Začít jedním dobrovolným pilotním předmětem.</a:t>
+              <a:t>Start with one voluntary pilot course.</a:t>
             </a:r>
           </a:p>
         </p:txBody>
@@ -14717,7 +14530,7 @@
                 </a:solidFill>
                 <a:latin typeface="Aptos"/>
               </a:rPr>
-              <a:t>Obtížné měření dopadu</a:t>
+              <a:t>Difficulty measuring impact</a:t>
             </a:r>
           </a:p>
         </p:txBody>
@@ -14808,7 +14621,7 @@
                 </a:solidFill>
                 <a:latin typeface="Aptos"/>
               </a:rPr>
-              <a:t>Spokojenost nemusí znamenat lepší učení</a:t>
+              <a:t>Satisfaction does not necessarily mean better learning</a:t>
             </a:r>
           </a:p>
         </p:txBody>
@@ -15081,7 +14894,7 @@
                 </a:solidFill>
                 <a:latin typeface="Aptos"/>
               </a:rPr>
-              <a:t>12 · V</a:t>
+              <a:t>12 · H</a:t>
             </a:r>
           </a:p>
         </p:txBody>
@@ -15172,7 +14985,7 @@
                 </a:solidFill>
                 <a:latin typeface="Aptos"/>
               </a:rPr>
-              <a:t>Kromě dotazníku použít krátký úkol bez AI.</a:t>
+              <a:t>Use a short task completed without AI in addition to the questionnaire.</a:t>
             </a:r>
           </a:p>
         </p:txBody>
@@ -15217,7 +15030,7 @@
                 </a:solidFill>
                 <a:latin typeface="Aptos"/>
               </a:rPr>
-              <a:t>Kategorie: 1–4 nízké · 5–9 střední (S) · 10–15 vysoké (V) · 16–25 kritické (K). Nejvyšší prioritou je spolupráce s vyučujícími u dlouhodobé změny hodnocení.</a:t>
+              <a:t>Categories: 1–4 low · 5–9 medium (M) · 10–15 high (H) · 16–25 critical (C). The highest priority is working with instructors on long-term assessment changes.</a:t>
             </a:r>
           </a:p>
         </p:txBody>
@@ -15297,7 +15110,7 @@
                 </a:solidFill>
                 <a:latin typeface="Aptos"/>
               </a:rPr>
-              <a:t>TÝM 10  ·  ZÁLOŽNÍ SLIDE  ·  ZOBRAZIT POUZE PŘI DISKUSI</a:t>
+              <a:t>TEAM 10  ·  BACKUP SLIDE  ·  SHOW ONLY IF NEEDED FOR DISCUSSION</a:t>
             </a:r>
           </a:p>
         </p:txBody>
@@ -15464,7 +15277,7 @@
                 </a:solidFill>
                 <a:latin typeface="Aptos Display"/>
               </a:rPr>
-              <a:t>Rozhodovací matice: srovnání variant</a:t>
+              <a:t>Decision matrix: comparing the options</a:t>
             </a:r>
           </a:p>
         </p:txBody>
@@ -15509,7 +15322,7 @@
                 </a:solidFill>
                 <a:latin typeface="Aptos"/>
               </a:rPr>
-              <a:t>Ilustrativní týmové hodnocení na škále 1–5 (5 = nejpříznivější); nejde o výsledek dotazníku.</a:t>
+              <a:t>Illustrative team ratings on a 1–5 scale (5 = most favourable); these are not questionnaire results.</a:t>
             </a:r>
           </a:p>
         </p:txBody>
@@ -15723,7 +15536,7 @@
                 </a:solidFill>
                 <a:latin typeface="Aptos"/>
               </a:rPr>
-              <a:t>VARIANTA</a:t>
+              <a:t>OPTION</a:t>
             </a:r>
           </a:p>
         </p:txBody>
@@ -15814,7 +15627,7 @@
                 </a:solidFill>
                 <a:latin typeface="Aptos"/>
               </a:rPr>
-              <a:t>ÚČINNOST</a:t>
+              <a:t>EFFECTIVENESS</a:t>
             </a:r>
           </a:p>
         </p:txBody>
@@ -15905,7 +15718,7 @@
                 </a:solidFill>
                 <a:latin typeface="Aptos"/>
               </a:rPr>
-              <a:t>PROVEDITELNOST</a:t>
+              <a:t>FEASIBILITY</a:t>
             </a:r>
           </a:p>
         </p:txBody>
@@ -15996,7 +15809,7 @@
                 </a:solidFill>
                 <a:latin typeface="Aptos"/>
               </a:rPr>
-              <a:t>NÁKLADY*</a:t>
+              <a:t>COST*</a:t>
             </a:r>
           </a:p>
         </p:txBody>
@@ -16087,7 +15900,7 @@
                 </a:solidFill>
                 <a:latin typeface="Aptos"/>
               </a:rPr>
-              <a:t>ŠKÁLOVATELNOST</a:t>
+              <a:t>SCALABILITY</a:t>
             </a:r>
           </a:p>
         </p:txBody>
@@ -16178,7 +15991,7 @@
                 </a:solidFill>
                 <a:latin typeface="Aptos"/>
               </a:rPr>
-              <a:t>A · Studijní průvodce</a:t>
+              <a:t>A · Study guide</a:t>
             </a:r>
           </a:p>
         </p:txBody>
@@ -16633,7 +16446,7 @@
                 </a:solidFill>
                 <a:latin typeface="Aptos"/>
               </a:rPr>
-              <a:t>B · Praktický workshop</a:t>
+              <a:t>B · Practical workshop</a:t>
             </a:r>
           </a:p>
         </p:txBody>
@@ -17088,7 +16901,7 @@
                 </a:solidFill>
                 <a:latin typeface="Aptos"/>
               </a:rPr>
-              <a:t>C · Změna hodnocení</a:t>
+              <a:t>C · Assessment design</a:t>
             </a:r>
           </a:p>
         </p:txBody>
@@ -17543,7 +17356,7 @@
                 </a:solidFill>
                 <a:latin typeface="Aptos"/>
               </a:rPr>
-              <a:t>D · Současný přístup</a:t>
+              <a:t>D · Current approach</a:t>
             </a:r>
           </a:p>
         </p:txBody>
@@ -17914,52 +17727,6 @@
       </p:sp>
       <p:sp>
         <p:nvSpPr>
-          <p:cNvPr id="59" name="Rounded Rectangle 58"/>
-          <p:cNvSpPr/>
-          <p:nvPr/>
-        </p:nvSpPr>
-        <p:spPr>
-          <a:xfrm>
-            <a:off x="658368" y="4983480"/>
-            <a:ext cx="10927080" cy="786384"/>
-          </a:xfrm>
-          <a:prstGeom prst="roundRect">
-            <a:avLst/>
-          </a:prstGeom>
-          <a:solidFill>
-            <a:srgbClr val="FCF6EB"/>
-          </a:solidFill>
-          <a:ln w="8890">
-            <a:solidFill>
-              <a:srgbClr val="EFDCB8"/>
-            </a:solidFill>
-          </a:ln>
-        </p:spPr>
-        <p:style>
-          <a:lnRef idx="1">
-            <a:schemeClr val="accent1"/>
-          </a:lnRef>
-          <a:fillRef idx="3">
-            <a:schemeClr val="accent1"/>
-          </a:fillRef>
-          <a:effectRef idx="2">
-            <a:schemeClr val="accent1"/>
-          </a:effectRef>
-          <a:fontRef idx="minor">
-            <a:schemeClr val="lt1"/>
-          </a:fontRef>
-        </p:style>
-        <p:txBody>
-          <a:bodyPr rtlCol="0" anchor="ctr"/>
-          <a:lstStyle/>
-          <a:p>
-            <a:pPr algn="ctr"/>
-            <a:endParaRPr lang="cs-CZ" noProof="0" dirty="0"/>
-          </a:p>
-        </p:txBody>
-      </p:sp>
-      <p:sp>
-        <p:nvSpPr>
           <p:cNvPr id="60" name="TextBox 59"/>
           <p:cNvSpPr txBox="1"/>
           <p:nvPr/>
@@ -17998,7 +17765,7 @@
                 </a:solidFill>
                 <a:latin typeface="Aptos"/>
               </a:rPr>
-              <a:t>Interpretace: průvodce je nejsnazší začátek, workshop umožní nácvik a změna hodnocení má potenciál pro dlouhodobý dopad, ale vyžaduje součinnost FIS. Proto je navržena postupná kombinace, nikoli jednorázová volba jedné varianty.</a:t>
+              <a:t>Interpretation: the guide is the easiest starting point, the workshop enables practical training, and assessment changes have long-term potential but require cooperation from FIS. A phased combination is therefore proposed rather than choosing a single option.</a:t>
             </a:r>
           </a:p>
         </p:txBody>
@@ -18043,7 +17810,7 @@
                 </a:solidFill>
                 <a:latin typeface="Aptos"/>
               </a:rPr>
-              <a:t>* U nákladů znamená 5 nízké náklady / malé úsilí. Hodnocení je odborný úsudek týmu, ne objektivní měření.</a:t>
+              <a:t>* For cost, 5 means low cost / low effort. Ratings reflect the team’s judgment, not objective measurements.</a:t>
             </a:r>
           </a:p>
         </p:txBody>
@@ -18123,7 +17890,7 @@
                 </a:solidFill>
                 <a:latin typeface="Aptos"/>
               </a:rPr>
-              <a:t>TÝM 10  ·  ZÁLOŽNÍ SLIDE  ·  ZOBRAZIT POUZE PŘI DISKUSI</a:t>
+              <a:t>TEAM 10  ·  BACKUP SLIDE  ·  SHOW ONLY IF NEEDED FOR DISCUSSION</a:t>
             </a:r>
           </a:p>
         </p:txBody>
@@ -18290,7 +18057,7 @@
                 </a:solidFill>
                 <a:latin typeface="Aptos Display"/>
               </a:rPr>
-              <a:t>Co říká externí výzkum?</a:t>
+              <a:t>What does external research say?</a:t>
             </a:r>
           </a:p>
         </p:txBody>
@@ -18335,7 +18102,7 @@
                 </a:solidFill>
                 <a:latin typeface="Aptos"/>
               </a:rPr>
-              <a:t>Studie podporují principy navrženého řešení, ale nejsou přímým testem intervence na FIS.</a:t>
+              <a:t>The studies support the principles behind the proposed solution, but do not directly test the intervention at FIS.</a:t>
             </a:r>
           </a:p>
         </p:txBody>
@@ -18638,7 +18405,7 @@
                 </a:solidFill>
                 <a:latin typeface="Aptos"/>
               </a:rPr>
-              <a:t>Randomizovaný experiment ve středoškolské matematice: standardní AI zlepšila výkon při procvičování, ale skupina dopadla hůře při následném testu bez AI. Tutor s nápovědami nevykázal stejný statisticky významný negativní rozdíl.</a:t>
+              <a:t>A randomized experiment in high-school mathematics found that standard AI improved practice performance, but students performed worse on a later test without AI. An AI tutor providing hints did not show the same statistically significant negative difference.</a:t>
             </a:r>
           </a:p>
         </p:txBody>
@@ -18818,25 +18585,7 @@
                 </a:solidFill>
                 <a:latin typeface="Aptos"/>
               </a:rPr>
-              <a:t>Nápovědy generované </a:t>
-            </a:r>
-            <a:r>
-              <a:rPr lang="cs-CZ" sz="1040" b="0" i="0" noProof="0" dirty="0" err="1">
-                <a:solidFill>
-                  <a:srgbClr val="283442"/>
-                </a:solidFill>
-                <a:latin typeface="Aptos"/>
-              </a:rPr>
-              <a:t>ChatGPT</a:t>
-            </a:r>
-            <a:r>
-              <a:rPr lang="cs-CZ" sz="1040" b="0" i="0" noProof="0" dirty="0">
-                <a:solidFill>
-                  <a:srgbClr val="283442"/>
-                </a:solidFill>
-                <a:latin typeface="Aptos"/>
-              </a:rPr>
-              <a:t> přinesly učební zisky srovnatelné s nápovědami od lidských tutorů u matematických úloh. Část nápověd však obsahovala chyby, což podporuje potřebu ověřování.</a:t>
+              <a:t>ChatGPT-generated hints produced learning gains comparable to hints written by human tutors for math problems. However, some hints contained errors, reinforcing the need for verification.</a:t>
             </a:r>
           </a:p>
         </p:txBody>
@@ -19016,7 +18765,7 @@
                 </a:solidFill>
                 <a:latin typeface="Aptos"/>
               </a:rPr>
-              <a:t>Systematický přehled shrnuje možné faktory a důsledky nadměrného spoléhání studentů na generativní AI. Jde o širší kontext, nikoli důkaz konkrétních příčin u prváků FIS.</a:t>
+              <a:t>A systematic review summarizes possible factors and consequences of students’ overreliance on generative AI. It provides broader context, not proof of specific causes among first-year FIS students.</a:t>
             </a:r>
           </a:p>
         </p:txBody>
@@ -19196,25 +18945,7 @@
                 </a:solidFill>
                 <a:latin typeface="Aptos"/>
               </a:rPr>
-              <a:t>Výzkum univerzitních studentů zkoumal motivace a důsledky používání generativní AI; je relevantní pro témata </a:t>
-            </a:r>
-            <a:r>
-              <a:rPr lang="cs-CZ" sz="1010" b="0" i="0" noProof="0" dirty="0" err="1">
-                <a:solidFill>
-                  <a:srgbClr val="283442"/>
-                </a:solidFill>
-                <a:latin typeface="Aptos"/>
-              </a:rPr>
-              <a:t>workloadu</a:t>
-            </a:r>
-            <a:r>
-              <a:rPr lang="cs-CZ" sz="1010" b="0" i="0" noProof="0" dirty="0">
-                <a:solidFill>
-                  <a:srgbClr val="283442"/>
-                </a:solidFill>
-                <a:latin typeface="Aptos"/>
-              </a:rPr>
-              <a:t> a pohodlnosti, ale jeho výsledky nelze automaticky přenést na FIS.</a:t>
+              <a:t>Research on university students examined motivations for and consequences of generative AI use. It is relevant to workload and convenience, but its findings cannot automatically be generalized to FIS.</a:t>
             </a:r>
           </a:p>
         </p:txBody>
@@ -19259,7 +18990,7 @@
                 </a:solidFill>
                 <a:latin typeface="Aptos"/>
               </a:rPr>
-              <a:t>Závěr pro tým: neprohlašujeme, že AI je vždy škodlivá; zaměřujeme se na používání, které zachovává vlastní pokus, nápovědu a ověření.</a:t>
+              <a:t>Our conclusion: we do not claim that AI is always harmful. We focus on using it in ways that preserve independent attempts, hints, and verification.</a:t>
             </a:r>
           </a:p>
         </p:txBody>
@@ -19339,7 +19070,7 @@
                 </a:solidFill>
                 <a:latin typeface="Aptos"/>
               </a:rPr>
-              <a:t>TÝM 10  ·  ZÁLOŽNÍ SLIDE  ·  ZOBRAZIT POUZE PŘI DISKUSI</a:t>
+              <a:t>TEAM 10  ·  BACKUP SLIDE  ·  SHOW ONLY IF NEEDED FOR DISCUSSION</a:t>
             </a:r>
           </a:p>
         </p:txBody>
@@ -19506,59 +19237,8 @@
                 </a:solidFill>
                 <a:latin typeface="Aptos Display"/>
               </a:rPr>
-              <a:t>Ukázka řešení: pravidlo Try → </a:t>
-            </a:r>
-            <a:r>
-              <a:rPr lang="cs-CZ" sz="2600" b="1" i="0" noProof="0" dirty="0" err="1">
-                <a:solidFill>
-                  <a:srgbClr val="132A43"/>
-                </a:solidFill>
-                <a:latin typeface="Aptos Display"/>
-              </a:rPr>
-              <a:t>Hint</a:t>
-            </a:r>
-            <a:r>
-              <a:rPr lang="cs-CZ" sz="2600" b="1" i="0" noProof="0" dirty="0">
-                <a:solidFill>
-                  <a:srgbClr val="132A43"/>
-                </a:solidFill>
-                <a:latin typeface="Aptos Display"/>
-              </a:rPr>
-              <a:t> → </a:t>
-            </a:r>
-            <a:r>
-              <a:rPr lang="cs-CZ" sz="2600" b="1" i="0" noProof="0" dirty="0" err="1">
-                <a:solidFill>
-                  <a:srgbClr val="132A43"/>
-                </a:solidFill>
-                <a:latin typeface="Aptos Display"/>
-              </a:rPr>
-              <a:t>Solve</a:t>
-            </a:r>
-            <a:r>
-              <a:rPr lang="cs-CZ" sz="2600" b="1" i="0" noProof="0" dirty="0">
-                <a:solidFill>
-                  <a:srgbClr val="132A43"/>
-                </a:solidFill>
-                <a:latin typeface="Aptos Display"/>
-              </a:rPr>
-              <a:t> → </a:t>
-            </a:r>
-            <a:r>
-              <a:rPr lang="cs-CZ" sz="2600" b="1" i="0" noProof="0" dirty="0" err="1">
-                <a:solidFill>
-                  <a:srgbClr val="132A43"/>
-                </a:solidFill>
-                <a:latin typeface="Aptos Display"/>
-              </a:rPr>
-              <a:t>Verify</a:t>
-            </a:r>
-            <a:endParaRPr lang="cs-CZ" sz="2600" b="1" i="0" noProof="0" dirty="0">
-              <a:solidFill>
-                <a:srgbClr val="132A43"/>
-              </a:solidFill>
-              <a:latin typeface="Aptos Display"/>
-            </a:endParaRPr>
+              <a:t>Solution example: the Try → Hint → Solve → Verify rule</a:t>
+            </a:r>
           </a:p>
         </p:txBody>
       </p:sp>
@@ -19602,7 +19282,7 @@
                 </a:solidFill>
                 <a:latin typeface="Aptos"/>
               </a:rPr>
-              <a:t>Konkrétní obsah, který může být součástí jednostránkového průvodce a workshopu.</a:t>
+              <a:t>Example content for the one-page guide and workshop.</a:t>
             </a:r>
           </a:p>
         </p:txBody>
@@ -19905,7 +19585,7 @@
                 </a:solidFill>
                 <a:latin typeface="Aptos"/>
               </a:rPr>
-              <a:t>Nejdřív zkus úlohu samostatně. Zapiš, co už víš a kde ses zasekl.</a:t>
+              <a:t>First, try the task on your own. Write down what you already know and where you get stuck.</a:t>
             </a:r>
           </a:p>
           <a:p>
@@ -19946,7 +19626,7 @@
                 </a:solidFill>
                 <a:latin typeface="Aptos"/>
               </a:rPr>
-              <a:t>Nezačínej okamžitým požadavkem na kompletní řešení.</a:t>
+              <a:t>Do not start by immediately asking for the complete solution.</a:t>
             </a:r>
           </a:p>
         </p:txBody>
@@ -20126,7 +19806,7 @@
                 </a:solidFill>
                 <a:latin typeface="Aptos"/>
               </a:rPr>
-              <a:t>Požádej o nápovědu, ne o finální odpověď.</a:t>
+              <a:t>Ask for a hint, not the final answer.</a:t>
             </a:r>
           </a:p>
           <a:p>
@@ -20509,7 +20189,7 @@
                 </a:solidFill>
                 <a:latin typeface="Aptos"/>
               </a:rPr>
-              <a:t>Vyřeš úlohu vlastními slovy nebo kódem a vysvětli svůj postup.</a:t>
+              <a:t>Solve the task in your own words or code, and explain your reasoning.</a:t>
             </a:r>
           </a:p>
           <a:p>
@@ -20892,7 +20572,7 @@
                 </a:solidFill>
                 <a:latin typeface="Aptos"/>
               </a:rPr>
-              <a:t>Ověř výsledek proti materiálům, výpočtu, testům nebo důvěryhodnému zdroji.</a:t>
+              <a:t>Verify the result against course materials, calculations, tests, or a trustworthy source.</a:t>
             </a:r>
           </a:p>
           <a:p>
@@ -21120,52 +20800,6 @@
       </p:sp>
       <p:sp>
         <p:nvSpPr>
-          <p:cNvPr id="25" name="Rounded Rectangle 24"/>
-          <p:cNvSpPr/>
-          <p:nvPr/>
-        </p:nvSpPr>
-        <p:spPr>
-          <a:xfrm>
-            <a:off x="640080" y="5779008"/>
-            <a:ext cx="10881360" cy="393192"/>
-          </a:xfrm>
-          <a:prstGeom prst="roundRect">
-            <a:avLst/>
-          </a:prstGeom>
-          <a:solidFill>
-            <a:srgbClr val="F6F8FB"/>
-          </a:solidFill>
-          <a:ln w="7620">
-            <a:solidFill>
-              <a:srgbClr val="DAE2EB"/>
-            </a:solidFill>
-          </a:ln>
-        </p:spPr>
-        <p:style>
-          <a:lnRef idx="1">
-            <a:schemeClr val="accent1"/>
-          </a:lnRef>
-          <a:fillRef idx="3">
-            <a:schemeClr val="accent1"/>
-          </a:fillRef>
-          <a:effectRef idx="2">
-            <a:schemeClr val="accent1"/>
-          </a:effectRef>
-          <a:fontRef idx="minor">
-            <a:schemeClr val="lt1"/>
-          </a:fontRef>
-        </p:style>
-        <p:txBody>
-          <a:bodyPr rtlCol="0" anchor="ctr"/>
-          <a:lstStyle/>
-          <a:p>
-            <a:pPr algn="ctr"/>
-            <a:endParaRPr lang="cs-CZ" noProof="0" dirty="0"/>
-          </a:p>
-        </p:txBody>
-      </p:sp>
-      <p:sp>
-        <p:nvSpPr>
           <p:cNvPr id="26" name="TextBox 25"/>
           <p:cNvSpPr txBox="1"/>
           <p:nvPr/>
@@ -21204,7 +20838,7 @@
                 </a:solidFill>
                 <a:latin typeface="Aptos"/>
               </a:rPr>
-              <a:t>Smysl: AI má zvýšit porozumění a kvalitu samostatného řešení, nikoli jen urychlit získání odpovědi.</a:t>
+              <a:t>The goal: AI should improve understanding and the quality of independent problem-solving, not merely speed up getting an answer.</a:t>
             </a:r>
           </a:p>
         </p:txBody>
@@ -21284,7 +20918,7 @@
                 </a:solidFill>
                 <a:latin typeface="Aptos"/>
               </a:rPr>
-              <a:t>TÝM 10  ·  ZÁLOŽNÍ SLIDE  ·  ZOBRAZIT POUZE PŘI DISKUSI</a:t>
+              <a:t>TEAM 10  ·  BACKUP SLIDE  ·  SHOW ONLY IF NEEDED FOR DISCUSSION</a:t>
             </a:r>
           </a:p>
         </p:txBody>
@@ -21443,7 +21077,7 @@
                 </a:solidFill>
                 <a:latin typeface="Aptos Display"/>
               </a:rPr>
-              <a:t>Problém: když AI nahrazuje vlastní práci</a:t>
+              <a:t>The problem: when AI replaces independent work</a:t>
             </a:r>
           </a:p>
         </p:txBody>
@@ -21488,7 +21122,7 @@
                 </a:solidFill>
                 <a:latin typeface="Aptos"/>
               </a:rPr>
-              <a:t>Zaměřujeme se na nadměrné spoléhání na AI, nikoli na klinickou závislost.</a:t>
+              <a:t>We focus on overreliance on AI, not clinical addiction.</a:t>
             </a:r>
           </a:p>
         </p:txBody>
@@ -21700,7 +21334,7 @@
                 </a:solidFill>
                 <a:latin typeface="Aptos"/>
               </a:rPr>
-              <a:t>Hlavní problém: AI může usnadnit práci natolik, že student přeskočí část vlastního učení.</a:t>
+              <a:t>The core issue: AI can make tasks so easy that students skip part of the learning process.</a:t>
             </a:r>
           </a:p>
         </p:txBody>
@@ -21803,7 +21437,7 @@
         </p:nvSpPr>
         <p:spPr>
           <a:xfrm>
-            <a:off x="731520" y="2990088"/>
+            <a:off x="747522" y="2990088"/>
             <a:ext cx="5102352" cy="274320"/>
           </a:xfrm>
           <a:prstGeom prst="rect">
@@ -21829,13 +21463,13 @@
               </a:spcAft>
             </a:pPr>
             <a:r>
-              <a:rPr sz="1500" b="1" i="0">
+              <a:rPr sz="1500" b="1" i="0" dirty="0">
                 <a:solidFill>
                   <a:srgbClr val="1F8E89"/>
                 </a:solidFill>
                 <a:latin typeface="Aptos"/>
               </a:rPr>
-              <a:t>AI JAKO UČEBNÍ PARTNER</a:t>
+              <a:t>AI AS A LEARNING PARTNER</a:t>
             </a:r>
           </a:p>
         </p:txBody>
@@ -21880,7 +21514,7 @@
                 </a:solidFill>
                 <a:latin typeface="Aptos"/>
               </a:rPr>
-              <a:t>• Vysvětluje složité pojmy</a:t>
+              <a:t>• Explains complex concepts</a:t>
             </a:r>
           </a:p>
           <a:p>
@@ -21902,7 +21536,7 @@
                 </a:solidFill>
                 <a:latin typeface="Aptos"/>
               </a:rPr>
-              <a:t>• Nabízí nápovědu a procvičování</a:t>
+              <a:t>• Provides hints and practice</a:t>
             </a:r>
           </a:p>
           <a:p>
@@ -21924,7 +21558,7 @@
                 </a:solidFill>
                 <a:latin typeface="Aptos"/>
               </a:rPr>
-              <a:t>• Pomáhá ověřit vlastní postup</a:t>
+              <a:t>• Helps students check their own approach</a:t>
             </a:r>
           </a:p>
         </p:txBody>
@@ -22027,7 +21661,7 @@
         </p:nvSpPr>
         <p:spPr>
           <a:xfrm>
-            <a:off x="6382512" y="2990088"/>
+            <a:off x="6398514" y="2994661"/>
             <a:ext cx="5102352" cy="274320"/>
           </a:xfrm>
           <a:prstGeom prst="rect">
@@ -22053,13 +21687,13 @@
               </a:spcAft>
             </a:pPr>
             <a:r>
-              <a:rPr sz="1500" b="1" i="0">
+              <a:rPr sz="1500" b="1" i="0" dirty="0">
                 <a:solidFill>
                   <a:srgbClr val="D08D32"/>
                 </a:solidFill>
                 <a:latin typeface="Aptos"/>
               </a:rPr>
-              <a:t>AI JAKO ZKRATKA</a:t>
+              <a:t>AI AS A SHORTCUT</a:t>
             </a:r>
           </a:p>
         </p:txBody>
@@ -22104,7 +21738,7 @@
                 </a:solidFill>
                 <a:latin typeface="Aptos"/>
               </a:rPr>
-              <a:t>• Dává hotová řešení bez vlastního pokusu</a:t>
+              <a:t>• Provides finished solutions without an independent attempt</a:t>
             </a:r>
           </a:p>
           <a:p>
@@ -22126,7 +21760,7 @@
                 </a:solidFill>
                 <a:latin typeface="Aptos"/>
               </a:rPr>
-              <a:t>• Používá se i na jednoduché úkoly</a:t>
+              <a:t>• Is used even for simple tasks</a:t>
             </a:r>
           </a:p>
           <a:p>
@@ -22148,7 +21782,7 @@
                 </a:solidFill>
                 <a:latin typeface="Aptos"/>
               </a:rPr>
-              <a:t>• Výstup může být přijat bez dostatečné kontroly</a:t>
+              <a:t>• Its output may be accepted without sufficient verification</a:t>
             </a:r>
           </a:p>
         </p:txBody>
@@ -22193,7 +21827,7 @@
                 </a:solidFill>
                 <a:latin typeface="Aptos"/>
               </a:rPr>
-              <a:t>Naším cílem není AI zakázat, ale podpořit takové používání, které rozvíjí porozumění a samostatné řešení problémů.</a:t>
+              <a:t>Our goal is not to ban AI, but to encourage its use in ways that build understanding and independent problem-solving skills.</a:t>
             </a:r>
           </a:p>
         </p:txBody>
@@ -22273,7 +21907,7 @@
                 </a:solidFill>
                 <a:latin typeface="Aptos"/>
               </a:rPr>
-              <a:t>TÝM 10  ·  ŘEŠENÍ PROBLÉMŮ  ·  FIS VŠE  ·  OBSAH 1/10</a:t>
+              <a:t>TEAM 10  ·  PROBLEM SOLVING  ·  FIS, VŠE  ·  CONTENT 1/10</a:t>
             </a:r>
           </a:p>
         </p:txBody>
@@ -22395,7 +22029,7 @@
                 </a:solidFill>
                 <a:latin typeface="Aptos"/>
               </a:rPr>
-              <a:t>ZDROJE</a:t>
+              <a:t>REFERENCES</a:t>
             </a:r>
           </a:p>
         </p:txBody>
@@ -22440,7 +22074,7 @@
                 </a:solidFill>
                 <a:latin typeface="Aptos Display"/>
               </a:rPr>
-              <a:t>Použité zdroje</a:t>
+              <a:t>References</a:t>
             </a:r>
           </a:p>
         </p:txBody>
@@ -22485,7 +22119,7 @@
                 </a:solidFill>
                 <a:latin typeface="Aptos"/>
               </a:rPr>
-              <a:t>Čísla v hranatých závorkách na slidech odkazují na tyto zdroje.</a:t>
+              <a:t>Numbers in square brackets on the slides refer to these sources.</a:t>
             </a:r>
           </a:p>
         </p:txBody>
@@ -22699,7 +22333,7 @@
                 </a:solidFill>
                 <a:latin typeface="Aptos"/>
               </a:rPr>
-              <a:t>[1] Dotazník týmu 10</a:t>
+              <a:t>[1] Team 10 questionnaire</a:t>
             </a:r>
           </a:p>
         </p:txBody>
@@ -22744,115 +22378,7 @@
                 </a:solidFill>
                 <a:latin typeface="Aptos"/>
               </a:rPr>
-              <a:t>Team 10. (2026, 14.–15. října). Anonymous </a:t>
-            </a:r>
-            <a:r>
-              <a:rPr lang="cs-CZ" sz="880" b="0" i="0" noProof="0" dirty="0" err="1">
-                <a:solidFill>
-                  <a:srgbClr val="283442"/>
-                </a:solidFill>
-                <a:latin typeface="Aptos"/>
-              </a:rPr>
-              <a:t>questionnaire</a:t>
-            </a:r>
-            <a:r>
-              <a:rPr lang="cs-CZ" sz="880" b="0" i="0" noProof="0" dirty="0">
-                <a:solidFill>
-                  <a:srgbClr val="283442"/>
-                </a:solidFill>
-                <a:latin typeface="Aptos"/>
-              </a:rPr>
-              <a:t> on AI use </a:t>
-            </a:r>
-            <a:r>
-              <a:rPr lang="cs-CZ" sz="880" b="0" i="0" noProof="0" dirty="0" err="1">
-                <a:solidFill>
-                  <a:srgbClr val="283442"/>
-                </a:solidFill>
-                <a:latin typeface="Aptos"/>
-              </a:rPr>
-              <a:t>among</a:t>
-            </a:r>
-            <a:r>
-              <a:rPr lang="cs-CZ" sz="880" b="0" i="0" noProof="0" dirty="0">
-                <a:solidFill>
-                  <a:srgbClr val="283442"/>
-                </a:solidFill>
-                <a:latin typeface="Aptos"/>
-              </a:rPr>
-              <a:t> </a:t>
-            </a:r>
-            <a:r>
-              <a:rPr lang="cs-CZ" sz="880" b="0" i="0" noProof="0" dirty="0" err="1">
-                <a:solidFill>
-                  <a:srgbClr val="283442"/>
-                </a:solidFill>
-                <a:latin typeface="Aptos"/>
-              </a:rPr>
-              <a:t>first-year</a:t>
-            </a:r>
-            <a:r>
-              <a:rPr lang="cs-CZ" sz="880" b="0" i="0" noProof="0" dirty="0">
-                <a:solidFill>
-                  <a:srgbClr val="283442"/>
-                </a:solidFill>
-                <a:latin typeface="Aptos"/>
-              </a:rPr>
-              <a:t> FIS </a:t>
-            </a:r>
-            <a:r>
-              <a:rPr lang="cs-CZ" sz="880" b="0" i="0" noProof="0" dirty="0" err="1">
-                <a:solidFill>
-                  <a:srgbClr val="283442"/>
-                </a:solidFill>
-                <a:latin typeface="Aptos"/>
-              </a:rPr>
-              <a:t>students</a:t>
-            </a:r>
-            <a:r>
-              <a:rPr lang="cs-CZ" sz="880" b="0" i="0" noProof="0" dirty="0">
-                <a:solidFill>
-                  <a:srgbClr val="283442"/>
-                </a:solidFill>
-                <a:latin typeface="Aptos"/>
-              </a:rPr>
-              <a:t> [</a:t>
-            </a:r>
-            <a:r>
-              <a:rPr lang="cs-CZ" sz="880" b="0" i="0" noProof="0" dirty="0" err="1">
-                <a:solidFill>
-                  <a:srgbClr val="283442"/>
-                </a:solidFill>
-                <a:latin typeface="Aptos"/>
-              </a:rPr>
-              <a:t>unpublished</a:t>
-            </a:r>
-            <a:r>
-              <a:rPr lang="cs-CZ" sz="880" b="0" i="0" noProof="0" dirty="0">
-                <a:solidFill>
-                  <a:srgbClr val="283442"/>
-                </a:solidFill>
-                <a:latin typeface="Aptos"/>
-              </a:rPr>
-              <a:t> </a:t>
-            </a:r>
-            <a:r>
-              <a:rPr lang="cs-CZ" sz="880" b="0" i="0" noProof="0" dirty="0" err="1">
-                <a:solidFill>
-                  <a:srgbClr val="283442"/>
-                </a:solidFill>
-                <a:latin typeface="Aptos"/>
-              </a:rPr>
-              <a:t>survey</a:t>
-            </a:r>
-            <a:r>
-              <a:rPr lang="cs-CZ" sz="880" b="0" i="0" noProof="0" dirty="0">
-                <a:solidFill>
-                  <a:srgbClr val="283442"/>
-                </a:solidFill>
-                <a:latin typeface="Aptos"/>
-              </a:rPr>
-              <a:t> data, n = 23].</a:t>
+              <a:t>Team 10. (2026, October 14–15). Anonymous questionnaire on AI use among first-year FIS students [unpublished survey data, n = 23].</a:t>
             </a:r>
           </a:p>
         </p:txBody>
@@ -24882,7 +24408,7 @@
                 </a:solidFill>
                 <a:latin typeface="Aptos"/>
               </a:rPr>
-              <a:t>Poznámka k metodě</a:t>
+              <a:t>Methodological note</a:t>
             </a:r>
           </a:p>
         </p:txBody>
@@ -24927,34 +24453,7 @@
                 </a:solidFill>
                 <a:latin typeface="Aptos"/>
               </a:rPr>
-              <a:t>Fishbone</a:t>
-            </a:r>
-            <a:r>
-              <a:rPr lang="cs-CZ" sz="880" b="0" i="0" noProof="0" dirty="0">
-                <a:solidFill>
-                  <a:srgbClr val="283442"/>
-                </a:solidFill>
-                <a:latin typeface="Aptos"/>
-              </a:rPr>
-              <a:t> a 5 </a:t>
-            </a:r>
-            <a:r>
-              <a:rPr lang="cs-CZ" sz="880" b="0" i="0" noProof="0" dirty="0" err="1">
-                <a:solidFill>
-                  <a:srgbClr val="283442"/>
-                </a:solidFill>
-                <a:latin typeface="Aptos"/>
-              </a:rPr>
-              <a:t>Whys</a:t>
-            </a:r>
-            <a:r>
-              <a:rPr lang="cs-CZ" sz="880" b="0" i="0" noProof="0" dirty="0">
-                <a:solidFill>
-                  <a:srgbClr val="283442"/>
-                </a:solidFill>
-                <a:latin typeface="Aptos"/>
-              </a:rPr>
-              <a:t> slouží k uspořádání a prozkoumání možných příčin; diagram sám o sobě příčinné vztahy neprokazuje. Kořenová příčina v této práci je hypotéza odvozená z dostupných dat.</a:t>
+              <a:t>The Fishbone Diagram and 5 Whys are used to organize and explore possible causes; neither method proves causality on its own. The root cause proposed in this project is a hypothesis derived from the available data.</a:t>
             </a:r>
           </a:p>
         </p:txBody>
@@ -25034,7 +24533,7 @@
                 </a:solidFill>
                 <a:latin typeface="Aptos"/>
               </a:rPr>
-              <a:t>TÝM 10  ·  ŘEŠENÍ PROBLÉMŮ  ·  FIS VŠE</a:t>
+              <a:t>TEAM 10  ·  PROBLEM SOLVING  ·  FIS, VŠE</a:t>
             </a:r>
           </a:p>
         </p:txBody>
@@ -25079,7 +24578,7 @@
                 </a:solidFill>
                 <a:latin typeface="Aptos"/>
               </a:rPr>
-              <a:t>Tým 10 · FIS VŠE · 2026</a:t>
+              <a:t>Team 10 · FIS, VŠE · 2026</a:t>
             </a:r>
           </a:p>
         </p:txBody>
@@ -25238,7 +24737,7 @@
                 </a:solidFill>
                 <a:latin typeface="Aptos Display"/>
               </a:rPr>
-              <a:t>Proč je to důležité právě na FIS?</a:t>
+              <a:t>Why does this matter at FIS?</a:t>
             </a:r>
           </a:p>
         </p:txBody>
@@ -25283,7 +24782,7 @@
                 </a:solidFill>
                 <a:latin typeface="Aptos"/>
               </a:rPr>
-              <a:t>Rizika, pokud AI nahrazuje porozumění — ne tvrzení, že se tato rizika projeví u každého studenta.</a:t>
+              <a:t>These are risks that may arise when AI replaces understanding — not a claim that they affect every student.</a:t>
             </a:r>
           </a:p>
         </p:txBody>
@@ -25509,7 +25008,7 @@
         </p:nvSpPr>
         <p:spPr>
           <a:xfrm>
-            <a:off x="758952" y="1892807"/>
+            <a:off x="836675" y="1917953"/>
             <a:ext cx="3255264" cy="274320"/>
           </a:xfrm>
           <a:prstGeom prst="rect">
@@ -25535,13 +25034,13 @@
               </a:spcAft>
             </a:pPr>
             <a:r>
-              <a:rPr sz="1500" b="1" i="0">
+              <a:rPr sz="1500" b="1" i="0" dirty="0">
                 <a:solidFill>
                   <a:srgbClr val="3669BE"/>
                 </a:solidFill>
                 <a:latin typeface="Aptos"/>
               </a:rPr>
-              <a:t>SAMOSTATNÉ MYŠLENÍ</a:t>
+              <a:t>INDEPENDENT THINKING</a:t>
             </a:r>
           </a:p>
         </p:txBody>
@@ -25586,7 +25085,7 @@
                 </a:solidFill>
                 <a:latin typeface="Aptos"/>
               </a:rPr>
-              <a:t>Bez vlastních pokusů si student méně procvičuje formulaci postupu, hledání chyb a hodnocení informací.</a:t>
+              <a:t>Without making their own attempts, students get less practice developing an approach, finding errors, and evaluating information.</a:t>
             </a:r>
           </a:p>
         </p:txBody>
@@ -25689,7 +25188,7 @@
         </p:nvSpPr>
         <p:spPr>
           <a:xfrm>
-            <a:off x="4480559" y="1892807"/>
+            <a:off x="4608576" y="1912110"/>
             <a:ext cx="3255264" cy="274320"/>
           </a:xfrm>
           <a:prstGeom prst="rect">
@@ -25715,13 +25214,13 @@
               </a:spcAft>
             </a:pPr>
             <a:r>
-              <a:rPr sz="1500" b="1" i="0">
+              <a:rPr sz="1500" b="1" i="0" dirty="0">
                 <a:solidFill>
                   <a:srgbClr val="1F8E89"/>
                 </a:solidFill>
                 <a:latin typeface="Aptos"/>
               </a:rPr>
-              <a:t>ZKOUŠKY BEZ AI</a:t>
+              <a:t>EXAMS WITHOUT AI</a:t>
             </a:r>
           </a:p>
         </p:txBody>
@@ -25766,7 +25265,7 @@
                 </a:solidFill>
                 <a:latin typeface="Aptos"/>
               </a:rPr>
-              <a:t>Úspěšné dokončení úkolu s AI nemusí znamenat, že student dokáže podobný úkol vyřešit sám při testu nebo zkoušce.</a:t>
+              <a:t>Successfully completing a task with AI does not necessarily mean a student can solve a similar task independently in a test or exam.</a:t>
             </a:r>
           </a:p>
         </p:txBody>
@@ -25869,7 +25368,7 @@
         </p:nvSpPr>
         <p:spPr>
           <a:xfrm>
-            <a:off x="8202167" y="1892807"/>
+            <a:off x="8284463" y="1917953"/>
             <a:ext cx="3255264" cy="274320"/>
           </a:xfrm>
           <a:prstGeom prst="rect">
@@ -25895,13 +25394,13 @@
               </a:spcAft>
             </a:pPr>
             <a:r>
-              <a:rPr sz="1500" b="1" i="0">
+              <a:rPr sz="1500" b="1" i="0" dirty="0">
                 <a:solidFill>
                   <a:srgbClr val="D08D32"/>
                 </a:solidFill>
                 <a:latin typeface="Aptos"/>
               </a:rPr>
-              <a:t>BUDOUCÍ PRAXE V IT</a:t>
+              <a:t>FUTURE IT WORK</a:t>
             </a:r>
           </a:p>
         </p:txBody>
@@ -25946,54 +25445,8 @@
                 </a:solidFill>
                 <a:latin typeface="Aptos"/>
               </a:rPr>
-              <a:t>V IT a analytice je potřeba rozumět řešení, kontrolovat správnost výstupů a umět opravit chyby — nejen generovat výsledek.</a:t>
-            </a:r>
-          </a:p>
-        </p:txBody>
-      </p:sp>
-      <p:sp>
-        <p:nvSpPr>
-          <p:cNvPr id="21" name="Rounded Rectangle 20"/>
-          <p:cNvSpPr/>
-          <p:nvPr/>
-        </p:nvSpPr>
-        <p:spPr>
-          <a:xfrm>
-            <a:off x="621792" y="5513832"/>
-            <a:ext cx="10972800" cy="521207"/>
-          </a:xfrm>
-          <a:prstGeom prst="roundRect">
-            <a:avLst/>
-          </a:prstGeom>
-          <a:solidFill>
-            <a:srgbClr val="F6F8FB"/>
-          </a:solidFill>
-          <a:ln w="8890">
-            <a:solidFill>
-              <a:srgbClr val="DAE2EB"/>
-            </a:solidFill>
-          </a:ln>
-        </p:spPr>
-        <p:style>
-          <a:lnRef idx="1">
-            <a:schemeClr val="accent1"/>
-          </a:lnRef>
-          <a:fillRef idx="3">
-            <a:schemeClr val="accent1"/>
-          </a:fillRef>
-          <a:effectRef idx="2">
-            <a:schemeClr val="accent1"/>
-          </a:effectRef>
-          <a:fontRef idx="minor">
-            <a:schemeClr val="lt1"/>
-          </a:fontRef>
-        </p:style>
-        <p:txBody>
-          <a:bodyPr rtlCol="0" anchor="ctr"/>
-          <a:lstStyle/>
-          <a:p>
-            <a:pPr algn="ctr"/>
-            <a:endParaRPr/>
+              <a:t>In IT and analytics, people need to understand solutions, verify outputs, and fix errors — not just generate results.</a:t>
+            </a:r>
           </a:p>
         </p:txBody>
       </p:sp>
@@ -26037,7 +25490,7 @@
                 </a:solidFill>
                 <a:latin typeface="Aptos"/>
               </a:rPr>
-              <a:t>FIS je vhodné prostředí, kde se odpovědné a efektivní používání AI učit už během studia.</a:t>
+              <a:t>FIS is a good place to learn how to use AI responsibly and effectively while still at university.</a:t>
             </a:r>
           </a:p>
         </p:txBody>
@@ -26117,7 +25570,7 @@
                 </a:solidFill>
                 <a:latin typeface="Aptos"/>
               </a:rPr>
-              <a:t>TÝM 10  ·  ŘEŠENÍ PROBLÉMŮ  ·  FIS VŠE  ·  OBSAH 2/10</a:t>
+              <a:t>TEAM 10  ·  PROBLEM SOLVING  ·  FIS, VŠE  ·  CONTENT 2/10</a:t>
             </a:r>
           </a:p>
         </p:txBody>
@@ -26162,7 +25615,7 @@
                 </a:solidFill>
                 <a:latin typeface="Aptos"/>
               </a:rPr>
-              <a:t>Rizika podpořena výzkumem [2, 3]; formulace jsou podmíněné.</a:t>
+              <a:t>Risks are supported by research [2, 3]; statements are deliberately qualified.</a:t>
             </a:r>
           </a:p>
         </p:txBody>
@@ -26329,77 +25782,8 @@
                 </a:solidFill>
                 <a:latin typeface="Aptos Display"/>
               </a:rPr>
-              <a:t>Vymezení výzvy: </a:t>
-            </a:r>
-            <a:r>
-              <a:rPr lang="cs-CZ" sz="2600" b="1" i="0" noProof="0" dirty="0" err="1">
-                <a:solidFill>
-                  <a:srgbClr val="132A43"/>
-                </a:solidFill>
-                <a:latin typeface="Aptos Display"/>
-              </a:rPr>
-              <a:t>Hero</a:t>
-            </a:r>
-            <a:r>
-              <a:rPr lang="cs-CZ" sz="2600" b="1" i="0" noProof="0" dirty="0">
-                <a:solidFill>
-                  <a:srgbClr val="132A43"/>
-                </a:solidFill>
-                <a:latin typeface="Aptos Display"/>
-              </a:rPr>
-              <a:t> – </a:t>
-            </a:r>
-            <a:r>
-              <a:rPr lang="cs-CZ" sz="2600" b="1" i="0" noProof="0" dirty="0" err="1">
-                <a:solidFill>
-                  <a:srgbClr val="132A43"/>
-                </a:solidFill>
-                <a:latin typeface="Aptos Display"/>
-              </a:rPr>
-              <a:t>Treasure</a:t>
-            </a:r>
-            <a:r>
-              <a:rPr lang="cs-CZ" sz="2600" b="1" i="0" noProof="0" dirty="0">
-                <a:solidFill>
-                  <a:srgbClr val="132A43"/>
-                </a:solidFill>
-                <a:latin typeface="Aptos Display"/>
-              </a:rPr>
-              <a:t> – </a:t>
-            </a:r>
-            <a:r>
-              <a:rPr lang="cs-CZ" sz="2600" b="1" i="0" noProof="0" dirty="0" err="1">
-                <a:solidFill>
-                  <a:srgbClr val="132A43"/>
-                </a:solidFill>
-                <a:latin typeface="Aptos Display"/>
-              </a:rPr>
-              <a:t>Dragon</a:t>
-            </a:r>
-            <a:r>
-              <a:rPr lang="cs-CZ" sz="2600" b="1" i="0" noProof="0" dirty="0">
-                <a:solidFill>
-                  <a:srgbClr val="132A43"/>
-                </a:solidFill>
-                <a:latin typeface="Aptos Display"/>
-              </a:rPr>
-              <a:t> – </a:t>
-            </a:r>
-            <a:r>
-              <a:rPr lang="cs-CZ" sz="2600" b="1" i="0" noProof="0" dirty="0" err="1">
-                <a:solidFill>
-                  <a:srgbClr val="132A43"/>
-                </a:solidFill>
-                <a:latin typeface="Aptos Display"/>
-              </a:rPr>
-              <a:t>Quest</a:t>
-            </a:r>
-            <a:endParaRPr lang="cs-CZ" sz="2600" b="1" i="0" noProof="0" dirty="0">
-              <a:solidFill>
-                <a:srgbClr val="132A43"/>
-              </a:solidFill>
-              <a:latin typeface="Aptos Display"/>
-            </a:endParaRPr>
+              <a:t>Framing the challenge: Hero – Treasure – Dragon – Quest</a:t>
+            </a:r>
           </a:p>
         </p:txBody>
       </p:sp>
@@ -26443,7 +25827,7 @@
                 </a:solidFill>
                 <a:latin typeface="Aptos"/>
               </a:rPr>
-              <a:t>Přechod od popisu problému k cíli, ke kterému má návrh řešení směřovat.</a:t>
+              <a:t>Moving from describing the problem to defining the goal the proposed solution should achieve.</a:t>
             </a:r>
           </a:p>
         </p:txBody>
@@ -26701,7 +26085,7 @@
                 </a:solidFill>
                 <a:latin typeface="Aptos"/>
               </a:rPr>
-              <a:t>HERO  ·  KDO POTŘEBUJE ŘEŠENÍ?</a:t>
+              <a:t>HERO  ·  WHO NEEDS A SOLUTION?</a:t>
             </a:r>
           </a:p>
         </p:txBody>
@@ -26746,7 +26130,7 @@
                 </a:solidFill>
                 <a:latin typeface="Aptos"/>
               </a:rPr>
-              <a:t>Studenti 1. ročníku FIS, kteří si osvojují vysokoškolské studijní návyky a schopnost samostatně řešit problémy.</a:t>
+              <a:t>First-year FIS students who are developing university study habits and the ability to solve problems independently.</a:t>
             </a:r>
           </a:p>
         </p:txBody>
@@ -26881,7 +26265,7 @@
                 </a:solidFill>
                 <a:latin typeface="Aptos"/>
               </a:rPr>
-              <a:t>TREASURE  ·  JAK VYPADÁ ÚSPĚCH?</a:t>
+              <a:t>TREASURE  ·  WHAT DOES SUCCESS LOOK LIKE?</a:t>
             </a:r>
           </a:p>
         </p:txBody>
@@ -26926,7 +26310,7 @@
                 </a:solidFill>
                 <a:latin typeface="Aptos"/>
               </a:rPr>
-              <a:t>Studenti využívají AI k vysvětlení, procvičování a ověřování, ale stále dokážou úkol dokončit samostatně.</a:t>
+              <a:t>Students use AI for explanations, practice, and verification, while still being able to complete tasks independently.</a:t>
             </a:r>
           </a:p>
         </p:txBody>
@@ -27061,7 +26445,7 @@
                 </a:solidFill>
                 <a:latin typeface="Aptos"/>
               </a:rPr>
-              <a:t>DRAGON  ·  CO STOJÍ V CESTĚ?</a:t>
+              <a:t>DRAGON  ·  WHAT STANDS IN THE WAY?</a:t>
             </a:r>
           </a:p>
         </p:txBody>
@@ -27106,7 +26490,7 @@
                 </a:solidFill>
                 <a:latin typeface="Aptos"/>
               </a:rPr>
-              <a:t>Okamžité hotové odpovědi, časový tlak, náročné úkoly a nejistota, jak řešení začít.</a:t>
+              <a:t>Instant finished answers, time pressure, difficult tasks, and uncertainty about how to get started.</a:t>
             </a:r>
           </a:p>
         </p:txBody>
@@ -27241,7 +26625,7 @@
                 </a:solidFill>
                 <a:latin typeface="Aptos"/>
               </a:rPr>
-              <a:t>QUEST  ·  CO CHCEME VYŘEŠIT?</a:t>
+              <a:t>QUEST  ·  WHAT DO WE WANT TO SOLVE?</a:t>
             </a:r>
           </a:p>
         </p:txBody>
@@ -27286,7 +26670,7 @@
                 </a:solidFill>
                 <a:latin typeface="Aptos"/>
               </a:rPr>
-              <a:t>Jak pomoci prvákům FIS používat AI jako partnera při učení, aniž by nahrazovala jejich vlastní myšlení?</a:t>
+              <a:t>How can we help first-year FIS students use AI as a learning partner without letting it replace their own thinking?</a:t>
             </a:r>
           </a:p>
         </p:txBody>
@@ -27366,7 +26750,7 @@
                 </a:solidFill>
                 <a:latin typeface="Aptos"/>
               </a:rPr>
-              <a:t>TÝM 10  ·  ŘEŠENÍ PROBLÉMŮ  ·  FIS VŠE  ·  OBSAH 3/10</a:t>
+              <a:t>TEAM 10  ·  PROBLEM SOLVING  ·  FIS, VŠE  ·  CONTENT 3/10</a:t>
             </a:r>
           </a:p>
         </p:txBody>
@@ -27533,25 +26917,7 @@
                 </a:solidFill>
                 <a:latin typeface="Aptos Display"/>
               </a:rPr>
-              <a:t>Analýza možných příčin: </a:t>
-            </a:r>
-            <a:r>
-              <a:rPr lang="cs-CZ" sz="2600" b="1" i="0" noProof="0" dirty="0" err="1">
-                <a:solidFill>
-                  <a:srgbClr val="132A43"/>
-                </a:solidFill>
-                <a:latin typeface="Aptos Display"/>
-              </a:rPr>
-              <a:t>Fishbone</a:t>
-            </a:r>
-            <a:r>
-              <a:rPr lang="cs-CZ" sz="2600" b="1" i="0" noProof="0" dirty="0">
-                <a:solidFill>
-                  <a:srgbClr val="132A43"/>
-                </a:solidFill>
-                <a:latin typeface="Aptos Display"/>
-              </a:rPr>
-              <a:t> diagram</a:t>
+              <a:t>Analysis of possible causes: Fishbone Diagram</a:t>
             </a:r>
           </a:p>
         </p:txBody>
@@ -27596,7 +26962,7 @@
                 </a:solidFill>
                 <a:latin typeface="Aptos"/>
               </a:rPr>
-              <a:t>Příčiny podložené dotazníkem kombinujeme s faktory podpořenými externím výzkumem.</a:t>
+              <a:t>We combine causes suggested by the questionnaire with factors supported by external research.</a:t>
             </a:r>
           </a:p>
         </p:txBody>
@@ -27887,7 +27253,7 @@
                 </a:solidFill>
                 <a:latin typeface="Aptos"/>
               </a:rPr>
-              <a:t>NADMĚRNÉ</a:t>
+              <a:t>OVER-</a:t>
             </a:r>
           </a:p>
           <a:p>
@@ -27909,7 +27275,7 @@
                 </a:solidFill>
                 <a:latin typeface="Aptos"/>
               </a:rPr>
-              <a:t>SPOLÉHÁNÍ</a:t>
+              <a:t>RELIANCE</a:t>
             </a:r>
           </a:p>
           <a:p>
@@ -27931,7 +27297,7 @@
                 </a:solidFill>
                 <a:latin typeface="Aptos"/>
               </a:rPr>
-              <a:t>NA AI</a:t>
+              <a:t>ON AI</a:t>
             </a:r>
           </a:p>
         </p:txBody>
@@ -28066,7 +27432,7 @@
                 </a:solidFill>
                 <a:latin typeface="Aptos"/>
               </a:rPr>
-              <a:t>NÁROČNOST ÚKOLU</a:t>
+              <a:t>TASK DIFFICULTY</a:t>
             </a:r>
           </a:p>
         </p:txBody>
@@ -28111,7 +27477,7 @@
                 </a:solidFill>
                 <a:latin typeface="Aptos"/>
               </a:rPr>
-              <a:t>9/23 neví, kde začít</a:t>
+              <a:t>9/23 do not know where to start</a:t>
             </a:r>
           </a:p>
           <a:p>
@@ -28133,7 +27499,7 @@
                 </a:solidFill>
                 <a:latin typeface="Aptos"/>
               </a:rPr>
-              <a:t>* Nízká sebedůvěra / znalosti</a:t>
+              <a:t>* Low confidence / limited knowledge</a:t>
             </a:r>
           </a:p>
         </p:txBody>
@@ -28268,7 +27634,7 @@
                 </a:solidFill>
                 <a:latin typeface="Aptos"/>
               </a:rPr>
-              <a:t>STUDIJNÍ NÁVYKY</a:t>
+              <a:t>STUDY HABITS</a:t>
             </a:r>
           </a:p>
         </p:txBody>
@@ -28313,7 +27679,7 @@
                 </a:solidFill>
                 <a:latin typeface="Aptos"/>
               </a:rPr>
-              <a:t>12/23 používá AI na triviální úkoly</a:t>
+              <a:t>12/23 use AI for trivial tasks</a:t>
             </a:r>
           </a:p>
           <a:p>
@@ -28335,7 +27701,7 @@
                 </a:solidFill>
                 <a:latin typeface="Aptos"/>
               </a:rPr>
-              <a:t>4/23 ze zvyku či pohodlnosti</a:t>
+              <a:t>4/23 out of habit or convenience</a:t>
             </a:r>
           </a:p>
         </p:txBody>
@@ -28470,7 +27836,7 @@
                 </a:solidFill>
                 <a:latin typeface="Aptos"/>
               </a:rPr>
-              <a:t>ZÁTĚŽ A TERMÍNY</a:t>
+              <a:t>WORKLOAD &amp; DEADLINES</a:t>
             </a:r>
           </a:p>
         </p:txBody>
@@ -28515,7 +27881,7 @@
                 </a:solidFill>
                 <a:latin typeface="Aptos"/>
               </a:rPr>
-              <a:t>6/23 chce zvládat hodně úkolů</a:t>
+              <a:t>6/23 want to manage many tasks</a:t>
             </a:r>
           </a:p>
           <a:p>
@@ -28537,7 +27903,7 @@
                 </a:solidFill>
                 <a:latin typeface="Aptos"/>
               </a:rPr>
-              <a:t>* Tlak na efektivní dokončení</a:t>
+              <a:t>* Pressure to finish efficiently</a:t>
             </a:r>
           </a:p>
         </p:txBody>
@@ -28672,7 +28038,7 @@
                 </a:solidFill>
                 <a:latin typeface="Aptos"/>
               </a:rPr>
-              <a:t>STRATEGIE UČENÍ</a:t>
+              <a:t>LEARNING STRATEGIES</a:t>
             </a:r>
           </a:p>
         </p:txBody>
@@ -28717,7 +28083,7 @@
                 </a:solidFill>
                 <a:latin typeface="Aptos"/>
               </a:rPr>
-              <a:t>12/23: pomoc i náhrada vlastní práce</a:t>
+              <a:t>12/23: both support and replacement of their own work</a:t>
             </a:r>
           </a:p>
           <a:p>
@@ -28739,7 +28105,7 @@
                 </a:solidFill>
                 <a:latin typeface="Aptos"/>
               </a:rPr>
-              <a:t>4/23: hotová odpověď</a:t>
+              <a:t>4/23: a ready-made answer</a:t>
             </a:r>
           </a:p>
         </p:txBody>
@@ -28874,7 +28240,7 @@
                 </a:solidFill>
                 <a:latin typeface="Aptos"/>
               </a:rPr>
-              <a:t>ČAS A POHODLNOST</a:t>
+              <a:t>TIME &amp; CONVENIENCE</a:t>
             </a:r>
           </a:p>
         </p:txBody>
@@ -28919,7 +28285,7 @@
                 </a:solidFill>
                 <a:latin typeface="Aptos"/>
               </a:rPr>
-              <a:t>16/23 uvádí úsporu času a snazší práci</a:t>
+              <a:t>16/23 cite time savings and easier work</a:t>
             </a:r>
           </a:p>
           <a:p>
@@ -28941,7 +28307,7 @@
                 </a:solidFill>
                 <a:latin typeface="Aptos"/>
               </a:rPr>
-              <a:t>* Rychlý přístup k odpovědím</a:t>
+              <a:t>* Quick access to answers</a:t>
             </a:r>
           </a:p>
         </p:txBody>
@@ -29161,25 +28527,7 @@
                 </a:solidFill>
                 <a:latin typeface="Aptos"/>
               </a:rPr>
-              <a:t>* Faktor podpořen externí studií [4, 5]. </a:t>
-            </a:r>
-            <a:r>
-              <a:rPr lang="cs-CZ" sz="880" b="0" i="0" noProof="0" dirty="0" err="1">
-                <a:solidFill>
-                  <a:srgbClr val="667585"/>
-                </a:solidFill>
-                <a:latin typeface="Aptos"/>
-              </a:rPr>
-              <a:t>Fishbone</a:t>
-            </a:r>
-            <a:r>
-              <a:rPr lang="cs-CZ" sz="880" b="0" i="0" noProof="0" dirty="0">
-                <a:solidFill>
-                  <a:srgbClr val="667585"/>
-                </a:solidFill>
-                <a:latin typeface="Aptos"/>
-              </a:rPr>
-              <a:t> zobrazuje možné příčiny; sám o sobě neprokazuje příčinnou souvislost.</a:t>
+              <a:t>* This factor is supported by external studies [4, 5]. A fishbone diagram shows possible causes; it does not prove causation.</a:t>
             </a:r>
           </a:p>
         </p:txBody>
@@ -29259,7 +28607,7 @@
                 </a:solidFill>
                 <a:latin typeface="Aptos"/>
               </a:rPr>
-              <a:t>TÝM 10  ·  ŘEŠENÍ PROBLÉMŮ  ·  FIS VŠE  ·  OBSAH 4/10</a:t>
+              <a:t>TEAM 10  ·  PROBLEM SOLVING  ·  FIS, VŠE  ·  CONTENT 4/10</a:t>
             </a:r>
           </a:p>
         </p:txBody>
@@ -29304,7 +28652,7 @@
                 </a:solidFill>
                 <a:latin typeface="Aptos"/>
               </a:rPr>
-              <a:t>Lokální data: [1] · Externí výzkum: [4, 5]</a:t>
+              <a:t>Local data: [1] · External research: [4, 5]</a:t>
             </a:r>
           </a:p>
         </p:txBody>
@@ -29471,25 +28819,7 @@
                 </a:solidFill>
                 <a:latin typeface="Aptos Display"/>
               </a:rPr>
-              <a:t>5 </a:t>
-            </a:r>
-            <a:r>
-              <a:rPr lang="cs-CZ" sz="2600" b="1" i="0" noProof="0" dirty="0" err="1">
-                <a:solidFill>
-                  <a:srgbClr val="132A43"/>
-                </a:solidFill>
-                <a:latin typeface="Aptos Display"/>
-              </a:rPr>
-              <a:t>Whys</a:t>
-            </a:r>
-            <a:r>
-              <a:rPr lang="cs-CZ" sz="2600" b="1" i="0" noProof="0" dirty="0">
-                <a:solidFill>
-                  <a:srgbClr val="132A43"/>
-                </a:solidFill>
-                <a:latin typeface="Aptos Display"/>
-              </a:rPr>
-              <a:t>: od pozorovaného chování ke kořenové příčině</a:t>
+              <a:t>5 Whys: From observed behaviour to a root cause</a:t>
             </a:r>
           </a:p>
         </p:txBody>
@@ -29534,7 +28864,7 @@
                 </a:solidFill>
                 <a:latin typeface="Aptos"/>
               </a:rPr>
-              <a:t>Návazný řetězec kombinuje lokální data a externí výzkum; závěrečná příčina je hypotéza.</a:t>
+              <a:t>The chain combines local data and external research; the final cause is a hypothesis.</a:t>
             </a:r>
           </a:p>
         </p:txBody>
@@ -29837,7 +29167,7 @@
                 </a:solidFill>
                 <a:latin typeface="Aptos"/>
               </a:rPr>
-              <a:t>Proč někteří studenti používají AI i na jednoduché úkoly?</a:t>
+              <a:t>Why do some students use AI even for simple tasks?</a:t>
             </a:r>
           </a:p>
         </p:txBody>
@@ -29882,7 +29212,7 @@
                 </a:solidFill>
                 <a:latin typeface="Aptos"/>
               </a:rPr>
-              <a:t>Protože je rychlá a pohodlná.</a:t>
+              <a:t>Because it is fast and convenient.</a:t>
             </a:r>
           </a:p>
         </p:txBody>
@@ -29927,7 +29257,7 @@
                 </a:solidFill>
                 <a:latin typeface="Aptos"/>
               </a:rPr>
-              <a:t>16/23: úspora času [1]</a:t>
+              <a:t>16/23: time savings [1]</a:t>
             </a:r>
           </a:p>
         </p:txBody>
@@ -30107,7 +29437,7 @@
                 </a:solidFill>
                 <a:latin typeface="Aptos"/>
               </a:rPr>
-              <a:t>Proč upřednostňují rychlou odpověď?</a:t>
+              <a:t>Why do they prefer a quick answer?</a:t>
             </a:r>
           </a:p>
         </p:txBody>
@@ -30152,7 +29482,7 @@
                 </a:solidFill>
                 <a:latin typeface="Aptos"/>
               </a:rPr>
-              <a:t>Časový tlak a nejistota, jak začít, mohou AI zatraktivnit.</a:t>
+              <a:t>Time pressure and uncertainty about how to start can make AI more appealing.</a:t>
             </a:r>
           </a:p>
         </p:txBody>
@@ -30197,7 +29527,7 @@
                 </a:solidFill>
                 <a:latin typeface="Aptos"/>
               </a:rPr>
-              <a:t>9/23: neví, kde začít; 6/23: zátěž a termíny [1]</a:t>
+              <a:t>9/23: do not know where to start; 6/23: workload and deadlines [1]</a:t>
             </a:r>
           </a:p>
         </p:txBody>
@@ -30377,7 +29707,7 @@
                 </a:solidFill>
                 <a:latin typeface="Aptos"/>
               </a:rPr>
-              <a:t>Proč AI může nahrazovat učení?</a:t>
+              <a:t>Why can AI replace learning?</a:t>
             </a:r>
           </a:p>
         </p:txBody>
@@ -30422,7 +29752,7 @@
                 </a:solidFill>
                 <a:latin typeface="Aptos"/>
               </a:rPr>
-              <a:t>Poskytne hotovou odpověď bez samostatného řešení.</a:t>
+              <a:t>It provides a ready-made answer without independent problem-solving.</a:t>
             </a:r>
           </a:p>
         </p:txBody>
@@ -30467,7 +29797,7 @@
                 </a:solidFill>
                 <a:latin typeface="Aptos"/>
               </a:rPr>
-              <a:t>12/23: smíšené použití; 4/23: hotové odpovědi [1]</a:t>
+              <a:t>12/23: mixed use; 4/23: ready-made answers [1]</a:t>
             </a:r>
           </a:p>
         </p:txBody>
@@ -30647,7 +29977,7 @@
                 </a:solidFill>
                 <a:latin typeface="Aptos"/>
               </a:rPr>
-              <a:t>Proč hotová odpověď nemusí znamenat naučení?</a:t>
+              <a:t>Why does a ready-made answer not necessarily mean learning has occurred?</a:t>
             </a:r>
           </a:p>
         </p:txBody>
@@ -30692,7 +30022,7 @@
                 </a:solidFill>
                 <a:latin typeface="Aptos"/>
               </a:rPr>
-              <a:t>Student nemusí umět podobný úkol vyřešit bez AI.</a:t>
+              <a:t>The student may not be able to solve a similar task without AI.</a:t>
             </a:r>
           </a:p>
         </p:txBody>
@@ -30737,7 +30067,7 @@
                 </a:solidFill>
                 <a:latin typeface="Aptos"/>
               </a:rPr>
-              <a:t>Výzkum: výkon s AI ≠ samostatné učení [2, 3]</a:t>
+              <a:t>Research: performance with AI ≠ independent learning [2, 3]</a:t>
             </a:r>
           </a:p>
         </p:txBody>
@@ -30796,8 +30126,8 @@
         </p:nvSpPr>
         <p:spPr>
           <a:xfrm>
-            <a:off x="768096" y="5294376"/>
-            <a:ext cx="2926080" cy="530352"/>
+            <a:off x="1261872" y="5358384"/>
+            <a:ext cx="2907790" cy="320088"/>
           </a:xfrm>
           <a:prstGeom prst="rect">
             <a:avLst/>
@@ -30822,13 +30152,31 @@
               </a:spcAft>
             </a:pPr>
             <a:r>
-              <a:rPr lang="cs-CZ" sz="900" b="1" i="0" noProof="0" dirty="0">
-                <a:solidFill>
-                  <a:srgbClr val="D08D32"/>
-                </a:solidFill>
-                <a:latin typeface="Aptos"/>
-              </a:rPr>
-              <a:t>5  ·  Proč studenti nepoužívají AI důsledně jako učebního partnera?</a:t>
+              <a:rPr lang="cs-CZ" sz="1040" b="1" dirty="0">
+                <a:solidFill>
+                  <a:srgbClr val="132A43"/>
+                </a:solidFill>
+                <a:latin typeface="Aptos"/>
+              </a:rPr>
+              <a:t>Why do students not </a:t>
+            </a:r>
+            <a:r>
+              <a:rPr lang="cs-CZ" sz="1040" b="1" dirty="0" err="1">
+                <a:solidFill>
+                  <a:srgbClr val="132A43"/>
+                </a:solidFill>
+                <a:latin typeface="Aptos"/>
+              </a:rPr>
+              <a:t>consistently</a:t>
+            </a:r>
+            <a:r>
+              <a:rPr lang="cs-CZ" sz="1040" b="1" dirty="0">
+                <a:solidFill>
+                  <a:srgbClr val="132A43"/>
+                </a:solidFill>
+                <a:latin typeface="Aptos"/>
+              </a:rPr>
+              <a:t> use AI as a learning partner?</a:t>
             </a:r>
           </a:p>
         </p:txBody>
@@ -30841,8 +30189,8 @@
         </p:nvSpPr>
         <p:spPr>
           <a:xfrm>
-            <a:off x="3822191" y="5367528"/>
-            <a:ext cx="4078224" cy="301752"/>
+            <a:off x="4480560" y="5367528"/>
+            <a:ext cx="3264408" cy="344710"/>
           </a:xfrm>
           <a:prstGeom prst="rect">
             <a:avLst/>
@@ -30867,13 +30215,40 @@
               </a:spcAft>
             </a:pPr>
             <a:r>
+              <a:rPr lang="cs-CZ" sz="1120" b="1" i="0" noProof="0" dirty="0" err="1">
+                <a:solidFill>
+                  <a:srgbClr val="132A43"/>
+                </a:solidFill>
+                <a:latin typeface="Aptos"/>
+              </a:rPr>
+              <a:t>Possible</a:t>
+            </a:r>
+            <a:r>
               <a:rPr lang="cs-CZ" sz="1120" b="1" i="0" noProof="0" dirty="0">
                 <a:solidFill>
                   <a:srgbClr val="132A43"/>
                 </a:solidFill>
                 <a:latin typeface="Aptos"/>
               </a:rPr>
-              <a:t>Možná příčina: chybí ucelená strategie pro učení s AI</a:t>
+              <a:t>  </a:t>
+            </a:r>
+            <a:r>
+              <a:rPr lang="cs-CZ" sz="1120" b="1" i="0" noProof="0" dirty="0" err="1">
+                <a:solidFill>
+                  <a:srgbClr val="132A43"/>
+                </a:solidFill>
+                <a:latin typeface="Aptos"/>
+              </a:rPr>
+              <a:t>root</a:t>
+            </a:r>
+            <a:r>
+              <a:rPr lang="cs-CZ" sz="1120" b="1" i="0" noProof="0" dirty="0">
+                <a:solidFill>
+                  <a:srgbClr val="132A43"/>
+                </a:solidFill>
+                <a:latin typeface="Aptos"/>
+              </a:rPr>
+              <a:t> cause: a coherent strategy for learning with AI is missing</a:t>
             </a:r>
           </a:p>
         </p:txBody>
@@ -30886,8 +30261,8 @@
         </p:nvSpPr>
         <p:spPr>
           <a:xfrm>
-            <a:off x="8028431" y="5321808"/>
-            <a:ext cx="3264408" cy="420624"/>
+            <a:off x="8339327" y="5372100"/>
+            <a:ext cx="2953512" cy="280077"/>
           </a:xfrm>
           <a:prstGeom prst="rect">
             <a:avLst/>
@@ -30912,13 +30287,13 @@
               </a:spcAft>
             </a:pPr>
             <a:r>
-              <a:rPr lang="cs-CZ" sz="869" b="0" i="0" noProof="0" dirty="0">
+              <a:rPr lang="cs-CZ" sz="910" dirty="0">
                 <a:solidFill>
                   <a:srgbClr val="667585"/>
                 </a:solidFill>
                 <a:latin typeface="Aptos"/>
               </a:rPr>
-              <a:t>Hypotéza odvozená z dat; nebyla přímo ověřena u všech prváků FIS.</a:t>
+              <a:t>A hypothesis derived from the data; it was not directly tested with all first-year FIS students.</a:t>
             </a:r>
           </a:p>
         </p:txBody>
@@ -30963,61 +30338,7 @@
                 </a:solidFill>
                 <a:latin typeface="Aptos"/>
               </a:rPr>
-              <a:t>[1] Dotazník Team 10 (n = 23) · [2] </a:t>
-            </a:r>
-            <a:r>
-              <a:rPr lang="cs-CZ" sz="830" b="0" i="0" noProof="0" dirty="0" err="1">
-                <a:solidFill>
-                  <a:srgbClr val="667585"/>
-                </a:solidFill>
-                <a:latin typeface="Aptos"/>
-              </a:rPr>
-              <a:t>Bastani</a:t>
-            </a:r>
-            <a:r>
-              <a:rPr lang="cs-CZ" sz="830" b="0" i="0" noProof="0" dirty="0">
-                <a:solidFill>
-                  <a:srgbClr val="667585"/>
-                </a:solidFill>
-                <a:latin typeface="Aptos"/>
-              </a:rPr>
-              <a:t> et al. (2025) · [3] </a:t>
-            </a:r>
-            <a:r>
-              <a:rPr lang="cs-CZ" sz="830" b="0" i="0" noProof="0" dirty="0" err="1">
-                <a:solidFill>
-                  <a:srgbClr val="667585"/>
-                </a:solidFill>
-                <a:latin typeface="Aptos"/>
-              </a:rPr>
-              <a:t>Pardos</a:t>
-            </a:r>
-            <a:r>
-              <a:rPr lang="cs-CZ" sz="830" b="0" i="0" noProof="0" dirty="0">
-                <a:solidFill>
-                  <a:srgbClr val="667585"/>
-                </a:solidFill>
-                <a:latin typeface="Aptos"/>
-              </a:rPr>
-              <a:t> &amp; </a:t>
-            </a:r>
-            <a:r>
-              <a:rPr lang="cs-CZ" sz="830" b="0" i="0" noProof="0" dirty="0" err="1">
-                <a:solidFill>
-                  <a:srgbClr val="667585"/>
-                </a:solidFill>
-                <a:latin typeface="Aptos"/>
-              </a:rPr>
-              <a:t>Bhandari</a:t>
-            </a:r>
-            <a:r>
-              <a:rPr lang="cs-CZ" sz="830" b="0" i="0" noProof="0" dirty="0">
-                <a:solidFill>
-                  <a:srgbClr val="667585"/>
-                </a:solidFill>
-                <a:latin typeface="Aptos"/>
-              </a:rPr>
-              <a:t> (2024)</a:t>
+              <a:t>[1] Team 10 questionnaire (n = 23) · [2] Bastani et al. (2025) · [3] Pardos &amp; Bhandari (2024)</a:t>
             </a:r>
           </a:p>
         </p:txBody>
@@ -31097,8 +30418,99 @@
                 </a:solidFill>
                 <a:latin typeface="Aptos"/>
               </a:rPr>
-              <a:t>TÝM 10  ·  ŘEŠENÍ PROBLÉMŮ  ·  FIS VŠE  ·  OBSAH 5/10</a:t>
-            </a:r>
+              <a:t>TEAM 10  ·  PROBLEM SOLVING  ·  FIS, VŠE  ·  CONTENT 5/10</a:t>
+            </a:r>
+          </a:p>
+        </p:txBody>
+      </p:sp>
+      <p:sp>
+        <p:nvSpPr>
+          <p:cNvPr id="41" name="Oval 21">
+            <a:extLst>
+              <a:ext uri="{FF2B5EF4-FFF2-40B4-BE49-F238E27FC236}">
+                <a16:creationId xmlns:a16="http://schemas.microsoft.com/office/drawing/2014/main" id="{D23E03E4-C348-251D-9466-85C793A3515B}"/>
+              </a:ext>
+            </a:extLst>
+          </p:cNvPr>
+          <p:cNvSpPr/>
+          <p:nvPr/>
+        </p:nvSpPr>
+        <p:spPr>
+          <a:xfrm>
+            <a:off x="731520" y="5358384"/>
+            <a:ext cx="384048" cy="384048"/>
+          </a:xfrm>
+          <a:prstGeom prst="ellipse">
+            <a:avLst/>
+          </a:prstGeom>
+          <a:solidFill>
+            <a:srgbClr val="D08D32"/>
+          </a:solidFill>
+          <a:ln>
+            <a:noFill/>
+          </a:ln>
+        </p:spPr>
+        <p:style>
+          <a:lnRef idx="1">
+            <a:schemeClr val="accent1"/>
+          </a:lnRef>
+          <a:fillRef idx="3">
+            <a:schemeClr val="accent1"/>
+          </a:fillRef>
+          <a:effectRef idx="2">
+            <a:schemeClr val="accent1"/>
+          </a:effectRef>
+          <a:fontRef idx="minor">
+            <a:schemeClr val="lt1"/>
+          </a:fontRef>
+        </p:style>
+        <p:txBody>
+          <a:bodyPr rtlCol="0" anchor="ctr"/>
+          <a:lstStyle/>
+          <a:p>
+            <a:pPr algn="ctr"/>
+            <a:endParaRPr lang="cs-CZ" noProof="0" dirty="0"/>
+          </a:p>
+        </p:txBody>
+      </p:sp>
+      <p:sp>
+        <p:nvSpPr>
+          <p:cNvPr id="43" name="TextovéPole 42">
+            <a:extLst>
+              <a:ext uri="{FF2B5EF4-FFF2-40B4-BE49-F238E27FC236}">
+                <a16:creationId xmlns:a16="http://schemas.microsoft.com/office/drawing/2014/main" id="{0377E95D-F9E2-51DE-1024-9F7A4536A1B7}"/>
+              </a:ext>
+            </a:extLst>
+          </p:cNvPr>
+          <p:cNvSpPr txBox="1"/>
+          <p:nvPr/>
+        </p:nvSpPr>
+        <p:spPr>
+          <a:xfrm>
+            <a:off x="791339" y="5404213"/>
+            <a:ext cx="316737" cy="292388"/>
+          </a:xfrm>
+          <a:prstGeom prst="rect">
+            <a:avLst/>
+          </a:prstGeom>
+          <a:noFill/>
+        </p:spPr>
+        <p:txBody>
+          <a:bodyPr wrap="square">
+            <a:spAutoFit/>
+          </a:bodyPr>
+          <a:lstStyle/>
+          <a:p>
+            <a:r>
+              <a:rPr lang="cs-CZ" sz="1300" b="1" i="0" noProof="0" dirty="0">
+                <a:solidFill>
+                  <a:srgbClr val="FFFFFF"/>
+                </a:solidFill>
+                <a:latin typeface="Aptos"/>
+              </a:rPr>
+              <a:t>5</a:t>
+            </a:r>
+            <a:endParaRPr lang="cs-CZ" dirty="0"/>
           </a:p>
         </p:txBody>
       </p:sp>
@@ -31264,7 +30676,7 @@
                 </a:solidFill>
                 <a:latin typeface="Aptos Display"/>
               </a:rPr>
-              <a:t>Jaké varianty řešení zvažujeme?</a:t>
+              <a:t>What solution options are we considering?</a:t>
             </a:r>
           </a:p>
         </p:txBody>
@@ -31309,7 +30721,7 @@
                 </a:solidFill>
                 <a:latin typeface="Aptos"/>
               </a:rPr>
-              <a:t>Čtyři možnosti vycházejí z požadavků zadání a z preferencí respondentů.</a:t>
+              <a:t>The four options reflect the assignment requirements and respondents’ preferences.</a:t>
             </a:r>
           </a:p>
         </p:txBody>
@@ -31567,7 +30979,7 @@
                 </a:solidFill>
                 <a:latin typeface="Aptos"/>
               </a:rPr>
-              <a:t>A  ·  STUDIJNÍ PRŮVODCE K AI</a:t>
+              <a:t>A  ·  AI STUDY GUIDE</a:t>
             </a:r>
           </a:p>
         </p:txBody>
@@ -31612,7 +31024,7 @@
                 </a:solidFill>
                 <a:latin typeface="Aptos"/>
               </a:rPr>
-              <a:t>Krátký návod: nápovědy místo hotových odpovědí, procvičování a ověřování výstupů.</a:t>
+              <a:t>A short guide: hints instead of finished answers, practice, and output verification.</a:t>
             </a:r>
           </a:p>
         </p:txBody>
@@ -31836,7 +31248,7 @@
                 </a:solidFill>
                 <a:latin typeface="Aptos"/>
               </a:rPr>
-              <a:t>B  ·  PRAKTICKÝ WORKSHOP</a:t>
+              <a:t>B  ·  PRACTICAL WORKSHOP</a:t>
             </a:r>
           </a:p>
         </p:txBody>
@@ -31881,7 +31293,7 @@
                 </a:solidFill>
                 <a:latin typeface="Aptos"/>
               </a:rPr>
-              <a:t>Krátké praktické cvičení: porovnat žádost o hotové řešení s promptem, který vede k samostatnému postupu.</a:t>
+              <a:t>A short practical exercise comparing a request for a complete solution with a prompt that guides independent problem-solving.</a:t>
             </a:r>
           </a:p>
         </p:txBody>
@@ -32105,7 +31517,7 @@
                 </a:solidFill>
                 <a:latin typeface="Aptos"/>
               </a:rPr>
-              <a:t>C  ·  ZMĚNA HODNOCENÍ</a:t>
+              <a:t>C  ·  ASSESSMENT DESIGN</a:t>
             </a:r>
           </a:p>
         </p:txBody>
@@ -32150,7 +31562,7 @@
                 </a:solidFill>
                 <a:latin typeface="Aptos"/>
               </a:rPr>
-              <a:t>Úlohy, které vyžadují vysvětlení postupu, samostatné řešení nebo krátkou obhajobu.</a:t>
+              <a:t>Tasks that require students to explain their approach, solve independently, or briefly defend their reasoning.</a:t>
             </a:r>
           </a:p>
         </p:txBody>
@@ -32374,7 +31786,7 @@
                 </a:solidFill>
                 <a:latin typeface="Aptos"/>
               </a:rPr>
-              <a:t>D  ·  ZACHOVAT SOUČASNÝ PŘÍSTUP</a:t>
+              <a:t>D  ·  MAINTAIN THE CURRENT APPROACH</a:t>
             </a:r>
           </a:p>
         </p:txBody>
@@ -32419,7 +31831,7 @@
                 </a:solidFill>
                 <a:latin typeface="Aptos"/>
               </a:rPr>
-              <a:t>Bez nové intervence. Nevyžaduje dodatečné zdroje, ale neřeší cíleně identifikované rizikové návyky.</a:t>
+              <a:t>No new intervention. It requires no additional resources, but does not directly address the identified risky habits.</a:t>
             </a:r>
           </a:p>
         </p:txBody>
@@ -32515,52 +31927,6 @@
       </p:sp>
       <p:sp>
         <p:nvSpPr>
-          <p:cNvPr id="33" name="Rounded Rectangle 32"/>
-          <p:cNvSpPr/>
-          <p:nvPr/>
-        </p:nvSpPr>
-        <p:spPr>
-          <a:xfrm>
-            <a:off x="612648" y="5513832"/>
-            <a:ext cx="10972800" cy="502920"/>
-          </a:xfrm>
-          <a:prstGeom prst="roundRect">
-            <a:avLst/>
-          </a:prstGeom>
-          <a:solidFill>
-            <a:srgbClr val="F6F8FB"/>
-          </a:solidFill>
-          <a:ln w="8890">
-            <a:solidFill>
-              <a:srgbClr val="DAE2EB"/>
-            </a:solidFill>
-          </a:ln>
-        </p:spPr>
-        <p:style>
-          <a:lnRef idx="1">
-            <a:schemeClr val="accent1"/>
-          </a:lnRef>
-          <a:fillRef idx="3">
-            <a:schemeClr val="accent1"/>
-          </a:fillRef>
-          <a:effectRef idx="2">
-            <a:schemeClr val="accent1"/>
-          </a:effectRef>
-          <a:fontRef idx="minor">
-            <a:schemeClr val="lt1"/>
-          </a:fontRef>
-        </p:style>
-        <p:txBody>
-          <a:bodyPr rtlCol="0" anchor="ctr"/>
-          <a:lstStyle/>
-          <a:p>
-            <a:pPr algn="ctr"/>
-            <a:endParaRPr lang="cs-CZ" noProof="0" dirty="0"/>
-          </a:p>
-        </p:txBody>
-      </p:sp>
-      <p:sp>
-        <p:nvSpPr>
           <p:cNvPr id="34" name="TextBox 33"/>
           <p:cNvSpPr txBox="1"/>
           <p:nvPr/>
@@ -32599,7 +31965,7 @@
                 </a:solidFill>
                 <a:latin typeface="Aptos"/>
               </a:rPr>
-              <a:t>* Seskupené odpovědi: průvodce (3) + praktické příklady (2); změna hodnocení (4) + jasnější pravidla (1). Současný přístup preferovalo 9/23.</a:t>
+              <a:t>* Grouped responses: guide (3) + practical examples (2); assessment design (4) + clearer rules (1). The current approach was preferred by 9/23 respondents.</a:t>
             </a:r>
           </a:p>
         </p:txBody>
@@ -32679,7 +32045,7 @@
                 </a:solidFill>
                 <a:latin typeface="Aptos"/>
               </a:rPr>
-              <a:t>TÝM 10  ·  ŘEŠENÍ PROBLÉMŮ  ·  FIS VŠE  ·  OBSAH 6/10</a:t>
+              <a:t>TEAM 10  ·  PROBLEM SOLVING  ·  FIS, VŠE  ·  CONTENT 6/10</a:t>
             </a:r>
           </a:p>
         </p:txBody>
@@ -32724,25 +32090,7 @@
                 </a:solidFill>
                 <a:latin typeface="Aptos"/>
               </a:rPr>
-              <a:t>Zdroj preferencí: Team 10 </a:t>
-            </a:r>
-            <a:r>
-              <a:rPr lang="cs-CZ" sz="720" b="0" i="0" noProof="0" dirty="0" err="1">
-                <a:solidFill>
-                  <a:srgbClr val="667585"/>
-                </a:solidFill>
-                <a:latin typeface="Aptos"/>
-              </a:rPr>
-              <a:t>questionnaire</a:t>
-            </a:r>
-            <a:r>
-              <a:rPr lang="cs-CZ" sz="720" b="0" i="0" noProof="0" dirty="0">
-                <a:solidFill>
-                  <a:srgbClr val="667585"/>
-                </a:solidFill>
-                <a:latin typeface="Aptos"/>
-              </a:rPr>
-              <a:t> [1].</a:t>
+              <a:t>Source of preferences: Team 10 questionnaire [1].</a:t>
             </a:r>
           </a:p>
         </p:txBody>
@@ -32909,7 +32257,7 @@
                 </a:solidFill>
                 <a:latin typeface="Aptos Display"/>
               </a:rPr>
-              <a:t>Výhody, nevýhody a potřebné zdroje</a:t>
+              <a:t>Advantages, limitations, and required resources</a:t>
             </a:r>
           </a:p>
         </p:txBody>
@@ -32954,7 +32302,7 @@
                 </a:solidFill>
                 <a:latin typeface="Aptos"/>
               </a:rPr>
-              <a:t>Porovnání ukazuje kompromisy; výhody a nevýhody nebyly empiricky ověřeny na FIS.</a:t>
+              <a:t>The comparison highlights trade-offs; the advantages and limitations have not been empirically tested at FIS.</a:t>
             </a:r>
           </a:p>
         </p:txBody>
@@ -33168,7 +32516,7 @@
                 </a:solidFill>
                 <a:latin typeface="Aptos"/>
               </a:rPr>
-              <a:t>VARIANTA</a:t>
+              <a:t>OPTION</a:t>
             </a:r>
           </a:p>
         </p:txBody>
@@ -33259,7 +32607,7 @@
                 </a:solidFill>
                 <a:latin typeface="Aptos"/>
               </a:rPr>
-              <a:t>VÝHODY</a:t>
+              <a:t>ADVANTAGES</a:t>
             </a:r>
           </a:p>
         </p:txBody>
@@ -33350,7 +32698,7 @@
                 </a:solidFill>
                 <a:latin typeface="Aptos"/>
               </a:rPr>
-              <a:t>OMEZENÍ / NEVÝHODY</a:t>
+              <a:t>LIMITATIONS / DISADVANTAGES</a:t>
             </a:r>
           </a:p>
         </p:txBody>
@@ -33441,7 +32789,7 @@
                 </a:solidFill>
                 <a:latin typeface="Aptos"/>
               </a:rPr>
-              <a:t>HLAVNÍ ZDROJE</a:t>
+              <a:t>KEY RESOURCES</a:t>
             </a:r>
           </a:p>
         </p:txBody>
@@ -33532,7 +32880,7 @@
                 </a:solidFill>
                 <a:latin typeface="Aptos"/>
               </a:rPr>
-              <a:t>Studijní průvodce</a:t>
+              <a:t>Study guide</a:t>
             </a:r>
           </a:p>
         </p:txBody>
@@ -33623,25 +32971,7 @@
                 </a:solidFill>
                 <a:latin typeface="Aptos"/>
               </a:rPr>
-              <a:t>Levný, dostupný kdykoli, snadno </a:t>
-            </a:r>
-            <a:r>
-              <a:rPr lang="cs-CZ" sz="1040" b="0" i="0" noProof="0" dirty="0" err="1">
-                <a:solidFill>
-                  <a:srgbClr val="283442"/>
-                </a:solidFill>
-                <a:latin typeface="Aptos"/>
-              </a:rPr>
-              <a:t>aktualizovatelný</a:t>
-            </a:r>
-            <a:r>
-              <a:rPr lang="cs-CZ" sz="1040" b="0" i="0" noProof="0" dirty="0">
-                <a:solidFill>
-                  <a:srgbClr val="283442"/>
-                </a:solidFill>
-                <a:latin typeface="Aptos"/>
-              </a:rPr>
-              <a:t>.</a:t>
+              <a:t>Low-cost, always available, and easy to update.</a:t>
             </a:r>
           </a:p>
         </p:txBody>
@@ -33732,7 +33062,7 @@
                 </a:solidFill>
                 <a:latin typeface="Aptos"/>
               </a:rPr>
-              <a:t>Přečtení nezaručí změnu návyku; student jej může ignorovat.</a:t>
+              <a:t>Reading it does not guarantee a change in habits; students may ignore it.</a:t>
             </a:r>
           </a:p>
         </p:txBody>
@@ -33823,7 +33153,7 @@
                 </a:solidFill>
                 <a:latin typeface="Aptos"/>
               </a:rPr>
-              <a:t>Příprava obsahu, revize a digitální distribuce.</a:t>
+              <a:t>Content development, review, and digital distribution.</a:t>
             </a:r>
           </a:p>
         </p:txBody>
@@ -33914,7 +33244,7 @@
                 </a:solidFill>
                 <a:latin typeface="Aptos"/>
               </a:rPr>
-              <a:t>Praktický workshop</a:t>
+              <a:t>Practical workshop</a:t>
             </a:r>
           </a:p>
         </p:txBody>
@@ -34005,7 +33335,7 @@
                 </a:solidFill>
                 <a:latin typeface="Aptos"/>
               </a:rPr>
-              <a:t>Procvičení na reálné úloze; prostor pro otázky a opravu chyb.</a:t>
+              <a:t>Practice with a real task, with room for questions and error correction.</a:t>
             </a:r>
           </a:p>
         </p:txBody>
@@ -34096,7 +33426,7 @@
                 </a:solidFill>
                 <a:latin typeface="Aptos"/>
               </a:rPr>
-              <a:t>Vyžaduje účast, přípravu a vhodný čas.</a:t>
+              <a:t>Requires attendance, preparation, and suitable timing.</a:t>
             </a:r>
           </a:p>
         </p:txBody>
@@ -34187,7 +33517,7 @@
                 </a:solidFill>
                 <a:latin typeface="Aptos"/>
               </a:rPr>
-              <a:t>Přednášející, úloha, AI nástroj, místnost a zpětná vazba.</a:t>
+              <a:t>Facilitator, task, AI tool, room, and feedback.</a:t>
             </a:r>
           </a:p>
         </p:txBody>
@@ -34278,7 +33608,7 @@
                 </a:solidFill>
                 <a:latin typeface="Aptos"/>
               </a:rPr>
-              <a:t>Změna hodnocení</a:t>
+              <a:t>Assessment design</a:t>
             </a:r>
           </a:p>
         </p:txBody>
@@ -34369,7 +33699,7 @@
                 </a:solidFill>
                 <a:latin typeface="Aptos"/>
               </a:rPr>
-              <a:t>Přímo ověřuje porozumění a podporuje samostatnost.</a:t>
+              <a:t>Directly checks understanding and encourages independence.</a:t>
             </a:r>
           </a:p>
         </p:txBody>
@@ -34460,7 +33790,7 @@
                 </a:solidFill>
                 <a:latin typeface="Aptos"/>
               </a:rPr>
-              <a:t>Vyžaduje spolupráci vyučujících a změnu úloh.</a:t>
+              <a:t>Requires instructor collaboration and changes to assignments.</a:t>
             </a:r>
           </a:p>
         </p:txBody>
@@ -34551,7 +33881,7 @@
                 </a:solidFill>
                 <a:latin typeface="Aptos"/>
               </a:rPr>
-              <a:t>Učitelé, návrh hodnocení a pilotní předmět.</a:t>
+              <a:t>Instructors, assessment design, and a pilot course.</a:t>
             </a:r>
           </a:p>
         </p:txBody>
@@ -34642,7 +33972,7 @@
                 </a:solidFill>
                 <a:latin typeface="Aptos"/>
               </a:rPr>
-              <a:t>Současný přístup</a:t>
+              <a:t>Current approach</a:t>
             </a:r>
           </a:p>
         </p:txBody>
@@ -34733,7 +34063,7 @@
                 </a:solidFill>
                 <a:latin typeface="Aptos"/>
               </a:rPr>
-              <a:t>Žádné dodatečné náklady ani organizační změny.</a:t>
+              <a:t>No additional costs or organizational changes.</a:t>
             </a:r>
           </a:p>
         </p:txBody>
@@ -34824,7 +34154,7 @@
                 </a:solidFill>
                 <a:latin typeface="Aptos"/>
               </a:rPr>
-              <a:t>Žádný cílený zásah do rizikových návyků.</a:t>
+              <a:t>No targeted intervention to address risky habits.</a:t>
             </a:r>
           </a:p>
         </p:txBody>
@@ -34915,7 +34245,7 @@
                 </a:solidFill>
                 <a:latin typeface="Aptos"/>
               </a:rPr>
-              <a:t>Bez dalších zdrojů.</a:t>
+              <a:t>No additional resources.</a:t>
             </a:r>
           </a:p>
         </p:txBody>
@@ -34960,79 +34290,7 @@
                 </a:solidFill>
                 <a:latin typeface="Aptos"/>
               </a:rPr>
-              <a:t>Principy </a:t>
-            </a:r>
-            <a:r>
-              <a:rPr lang="cs-CZ" sz="880" b="0" i="0" noProof="0" dirty="0" err="1">
-                <a:solidFill>
-                  <a:srgbClr val="667585"/>
-                </a:solidFill>
-                <a:latin typeface="Aptos"/>
-              </a:rPr>
-              <a:t>guided</a:t>
-            </a:r>
-            <a:r>
-              <a:rPr lang="cs-CZ" sz="880" b="0" i="0" noProof="0" dirty="0">
-                <a:solidFill>
-                  <a:srgbClr val="667585"/>
-                </a:solidFill>
-                <a:latin typeface="Aptos"/>
-              </a:rPr>
-              <a:t> AI learning a nápověd místo hotových řešení podporují </a:t>
-            </a:r>
-            <a:r>
-              <a:rPr lang="cs-CZ" sz="880" b="0" i="0" noProof="0" dirty="0" err="1">
-                <a:solidFill>
-                  <a:srgbClr val="667585"/>
-                </a:solidFill>
-                <a:latin typeface="Aptos"/>
-              </a:rPr>
-              <a:t>Bastani</a:t>
-            </a:r>
-            <a:r>
-              <a:rPr lang="cs-CZ" sz="880" b="0" i="0" noProof="0" dirty="0">
-                <a:solidFill>
-                  <a:srgbClr val="667585"/>
-                </a:solidFill>
-                <a:latin typeface="Aptos"/>
-              </a:rPr>
-              <a:t> et al. (2025) a </a:t>
-            </a:r>
-            <a:r>
-              <a:rPr lang="cs-CZ" sz="880" b="0" i="0" noProof="0" dirty="0" err="1">
-                <a:solidFill>
-                  <a:srgbClr val="667585"/>
-                </a:solidFill>
-                <a:latin typeface="Aptos"/>
-              </a:rPr>
-              <a:t>Pardos</a:t>
-            </a:r>
-            <a:r>
-              <a:rPr lang="cs-CZ" sz="880" b="0" i="0" noProof="0" dirty="0">
-                <a:solidFill>
-                  <a:srgbClr val="667585"/>
-                </a:solidFill>
-                <a:latin typeface="Aptos"/>
-              </a:rPr>
-              <a:t> &amp; </a:t>
-            </a:r>
-            <a:r>
-              <a:rPr lang="cs-CZ" sz="880" b="0" i="0" noProof="0" dirty="0" err="1">
-                <a:solidFill>
-                  <a:srgbClr val="667585"/>
-                </a:solidFill>
-                <a:latin typeface="Aptos"/>
-              </a:rPr>
-              <a:t>Bhandari</a:t>
-            </a:r>
-            <a:r>
-              <a:rPr lang="cs-CZ" sz="880" b="0" i="0" noProof="0" dirty="0">
-                <a:solidFill>
-                  <a:srgbClr val="667585"/>
-                </a:solidFill>
-                <a:latin typeface="Aptos"/>
-              </a:rPr>
-              <a:t> (2024) [2, 3].</a:t>
+              <a:t>The principles of guided AI learning and using hints instead of finished answers are supported by Bastani et al. (2025) and Pardos &amp; Bhandari (2024) [2, 3].</a:t>
             </a:r>
           </a:p>
         </p:txBody>
@@ -35112,7 +34370,7 @@
                 </a:solidFill>
                 <a:latin typeface="Aptos"/>
               </a:rPr>
-              <a:t>TÝM 10  ·  ŘEŠENÍ PROBLÉMŮ  ·  FIS VŠE  ·  OBSAH 7/10</a:t>
+              <a:t>TEAM 10  ·  PROBLEM SOLVING  ·  FIS, VŠE  ·  CONTENT 7/10</a:t>
             </a:r>
           </a:p>
         </p:txBody>
@@ -35157,16 +34415,7 @@
                 </a:solidFill>
                 <a:latin typeface="Aptos"/>
               </a:rPr>
-              <a:t>Trade-offs</a:t>
-            </a:r>
-            <a:r>
-              <a:rPr lang="cs-CZ" sz="720" b="0" i="0" noProof="0" dirty="0">
-                <a:solidFill>
-                  <a:srgbClr val="667585"/>
-                </a:solidFill>
-                <a:latin typeface="Aptos"/>
-              </a:rPr>
-              <a:t> jsou týmové hodnocení, ne výsledky měření na FIS.</a:t>
+              <a:t>Trade-offs reflect the team’s assessment, not measurements at FIS.</a:t>
             </a:r>
           </a:p>
         </p:txBody>
@@ -35288,7 +34537,7 @@
                 </a:solidFill>
                 <a:latin typeface="Aptos"/>
               </a:rPr>
-              <a:t>RIZIKA</a:t>
+              <a:t>RISKS</a:t>
             </a:r>
           </a:p>
         </p:txBody>
@@ -35333,7 +34582,7 @@
                 </a:solidFill>
                 <a:latin typeface="Aptos Display"/>
               </a:rPr>
-              <a:t>Riziková matice: které varianty nesou největší riziko?</a:t>
+              <a:t>Risk matrix: which options carry the greatest risk?</a:t>
             </a:r>
           </a:p>
         </p:txBody>
@@ -35378,7 +34627,7 @@
                 </a:solidFill>
                 <a:latin typeface="Aptos"/>
               </a:rPr>
-              <a:t>P = pravděpodobnost · D = dopad · skóre = P × D · obě hodnoty jsou týmové odhady na stupnici 1–5.</a:t>
+              <a:t>P = probability · I = impact · score = P × I · both values are team estimates on a 1–5 scale.</a:t>
             </a:r>
           </a:p>
         </p:txBody>
@@ -35546,7 +34795,7 @@
                 </a:solidFill>
                 <a:latin typeface="Aptos"/>
               </a:rPr>
-              <a:t>MATICE 5 × 5</a:t>
+              <a:t>5 × 5 MATRIX</a:t>
             </a:r>
           </a:p>
         </p:txBody>
@@ -36239,8 +35488,8 @@
         </p:nvSpPr>
         <p:spPr>
           <a:xfrm>
-            <a:off x="2976372" y="2029968"/>
-            <a:ext cx="434340" cy="402336"/>
+            <a:off x="2976372" y="2085839"/>
+            <a:ext cx="434340" cy="290592"/>
           </a:xfrm>
           <a:prstGeom prst="rect">
             <a:avLst/>
@@ -36254,18 +35503,34 @@
           <a:lstStyle/>
           <a:p>
             <a:pPr algn="ctr">
-              <a:lnSpc>
-                <a:spcPct val="100000"/>
-              </a:lnSpc>
-              <a:spcBef>
-                <a:spcPts val="0"/>
-              </a:spcBef>
-              <a:spcAft>
-                <a:spcPts val="300"/>
-              </a:spcAft>
-            </a:pPr>
-            <a:r>
-              <a:rPr lang="cs-CZ" sz="900" b="1" i="0" noProof="0" dirty="0">
+              <a:spcAft>
+                <a:spcPts val="300"/>
+              </a:spcAft>
+            </a:pPr>
+            <a:r>
+              <a:rPr lang="cs-CZ" sz="819" b="1" dirty="0">
+                <a:solidFill>
+                  <a:srgbClr val="B84F4F"/>
+                </a:solidFill>
+                <a:latin typeface="Aptos"/>
+              </a:rPr>
+              <a:t>D</a:t>
+            </a:r>
+          </a:p>
+          <a:p>
+            <a:pPr algn="ctr">
+              <a:lnSpc>
+                <a:spcPct val="100000"/>
+              </a:lnSpc>
+              <a:spcBef>
+                <a:spcPts val="0"/>
+              </a:spcBef>
+              <a:spcAft>
+                <a:spcPts val="300"/>
+              </a:spcAft>
+            </a:pPr>
+            <a:r>
+              <a:rPr lang="cs-CZ" sz="819" b="1" dirty="0">
                 <a:solidFill>
                   <a:srgbClr val="B84F4F"/>
                 </a:solidFill>
@@ -36648,8 +35913,8 @@
         </p:nvSpPr>
         <p:spPr>
           <a:xfrm>
-            <a:off x="2491740" y="2514600"/>
-            <a:ext cx="434340" cy="402336"/>
+            <a:off x="2491740" y="2570472"/>
+            <a:ext cx="434340" cy="290592"/>
           </a:xfrm>
           <a:prstGeom prst="rect">
             <a:avLst/>
@@ -36680,7 +35945,7 @@
                 </a:solidFill>
                 <a:latin typeface="Aptos"/>
               </a:rPr>
-              <a:t>C/D</a:t>
+              <a:t>C</a:t>
             </a:r>
           </a:p>
           <a:p>
@@ -38382,25 +37647,7 @@
                 </a:solidFill>
                 <a:latin typeface="Aptos"/>
               </a:rPr>
-              <a:t>P (</a:t>
-            </a:r>
-            <a:r>
-              <a:rPr lang="cs-CZ" sz="910" i="0" noProof="0" dirty="0">
-                <a:solidFill>
-                  <a:srgbClr val="667585"/>
-                </a:solidFill>
-                <a:latin typeface="Aptos"/>
-              </a:rPr>
-              <a:t>pravděpodobnost) </a:t>
-            </a:r>
-            <a:r>
-              <a:rPr lang="cs-CZ" sz="910" b="1" i="0" noProof="0" dirty="0">
-                <a:solidFill>
-                  <a:srgbClr val="667585"/>
-                </a:solidFill>
-                <a:latin typeface="Aptos"/>
-              </a:rPr>
-              <a:t>→</a:t>
+              <a:t>P (probability) →</a:t>
             </a:r>
           </a:p>
         </p:txBody>
@@ -38491,7 +37738,7 @@
                 </a:solidFill>
                 <a:latin typeface="Aptos"/>
               </a:rPr>
-              <a:t>1–4  Nízké</a:t>
+              <a:t>1–4  Low</a:t>
             </a:r>
           </a:p>
         </p:txBody>
@@ -38582,7 +37829,7 @@
                 </a:solidFill>
                 <a:latin typeface="Aptos"/>
               </a:rPr>
-              <a:t>5–9  Střední</a:t>
+              <a:t>5–9  Medium</a:t>
             </a:r>
           </a:p>
         </p:txBody>
@@ -38673,7 +37920,7 @@
                 </a:solidFill>
                 <a:latin typeface="Aptos"/>
               </a:rPr>
-              <a:t>10–15  Vysoké</a:t>
+              <a:t>10–15  High</a:t>
             </a:r>
           </a:p>
         </p:txBody>
@@ -38764,7 +38011,7 @@
                 </a:solidFill>
                 <a:latin typeface="Aptos"/>
               </a:rPr>
-              <a:t>16–25  Kritické</a:t>
+              <a:t>16–25  Critical</a:t>
             </a:r>
           </a:p>
         </p:txBody>
@@ -38809,7 +38056,7 @@
                 </a:solidFill>
                 <a:latin typeface="Aptos"/>
               </a:rPr>
-              <a:t>HLAVNÍ RIZIKO A OPATŘENÍ PRO JEDNOTLIVÉ VARIANTY</a:t>
+              <a:t>KEY RISKS AND MITIGATIONS FOR EACH OPTION</a:t>
             </a:r>
           </a:p>
         </p:txBody>
@@ -38983,7 +38230,7 @@
                 </a:solidFill>
                 <a:latin typeface="Aptos"/>
               </a:rPr>
-              <a:t>VARIANTA</a:t>
+              <a:t>OPTION</a:t>
             </a:r>
           </a:p>
         </p:txBody>
@@ -39074,7 +38321,7 @@
                 </a:solidFill>
                 <a:latin typeface="Aptos"/>
               </a:rPr>
-              <a:t>RIZIKO</a:t>
+              <a:t>RISK</a:t>
             </a:r>
           </a:p>
         </p:txBody>
@@ -39256,7 +38503,7 @@
                 </a:solidFill>
                 <a:latin typeface="Aptos"/>
               </a:rPr>
-              <a:t>D</a:t>
+              <a:t>I</a:t>
             </a:r>
           </a:p>
         </p:txBody>
@@ -39347,7 +38594,7 @@
                 </a:solidFill>
                 <a:latin typeface="Aptos"/>
               </a:rPr>
-              <a:t>P×D</a:t>
+              <a:t>P×I</a:t>
             </a:r>
           </a:p>
         </p:txBody>
@@ -39438,7 +38685,7 @@
                 </a:solidFill>
                 <a:latin typeface="Aptos"/>
               </a:rPr>
-              <a:t>MITIGACE / OMEZENÍ</a:t>
+              <a:t>MITIGATION / RESPONSE</a:t>
             </a:r>
           </a:p>
         </p:txBody>
@@ -39726,7 +38973,7 @@
                 </a:solidFill>
                 <a:latin typeface="Aptos"/>
               </a:rPr>
-              <a:t>Studenti návod nepoužijí</a:t>
+              <a:t>Students may not use the guide</a:t>
             </a:r>
           </a:p>
         </p:txBody>
@@ -39999,7 +39246,7 @@
                 </a:solidFill>
                 <a:latin typeface="Aptos"/>
               </a:rPr>
-              <a:t>12 · V</a:t>
+              <a:t>12 · H</a:t>
             </a:r>
           </a:p>
         </p:txBody>
@@ -40090,25 +39337,7 @@
                 </a:solidFill>
                 <a:latin typeface="Aptos"/>
               </a:rPr>
-              <a:t>Ukázat na cvičení; sdílet přes </a:t>
-            </a:r>
-            <a:r>
-              <a:rPr lang="cs-CZ" sz="810" b="0" i="0" noProof="0" dirty="0" err="1">
-                <a:solidFill>
-                  <a:srgbClr val="283442"/>
-                </a:solidFill>
-                <a:latin typeface="Aptos"/>
-              </a:rPr>
-              <a:t>InSIS</a:t>
-            </a:r>
-            <a:r>
-              <a:rPr lang="cs-CZ" sz="810" b="0" i="0" noProof="0" dirty="0">
-                <a:solidFill>
-                  <a:srgbClr val="283442"/>
-                </a:solidFill>
-                <a:latin typeface="Aptos"/>
-              </a:rPr>
-              <a:t>.</a:t>
+              <a:t>Introduce it in class; share it through InSIS.</a:t>
             </a:r>
           </a:p>
         </p:txBody>
@@ -40390,7 +39619,7 @@
                 </a:solidFill>
                 <a:latin typeface="Aptos"/>
               </a:rPr>
-              <a:t>Nízká účast / krátký efekt</a:t>
+              <a:t>Low attendance / short-lived effect</a:t>
             </a:r>
           </a:p>
         </p:txBody>
@@ -40663,7 +39892,7 @@
                 </a:solidFill>
                 <a:latin typeface="Aptos"/>
               </a:rPr>
-              <a:t>9 · S</a:t>
+              <a:t>9 · M</a:t>
             </a:r>
           </a:p>
         </p:txBody>
@@ -40754,25 +39983,7 @@
                 </a:solidFill>
                 <a:latin typeface="Aptos"/>
               </a:rPr>
-              <a:t>Zařadit do běžného cvičení; následný </a:t>
-            </a:r>
-            <a:r>
-              <a:rPr lang="cs-CZ" sz="810" b="0" i="0" noProof="0" dirty="0" err="1">
-                <a:solidFill>
-                  <a:srgbClr val="283442"/>
-                </a:solidFill>
-                <a:latin typeface="Aptos"/>
-              </a:rPr>
-              <a:t>follow</a:t>
-            </a:r>
-            <a:r>
-              <a:rPr lang="cs-CZ" sz="810" b="0" i="0" noProof="0" dirty="0">
-                <a:solidFill>
-                  <a:srgbClr val="283442"/>
-                </a:solidFill>
-                <a:latin typeface="Aptos"/>
-              </a:rPr>
-              <a:t>-up.</a:t>
+              <a:t>Include it in a regular class; follow up afterwards.</a:t>
             </a:r>
           </a:p>
         </p:txBody>
@@ -41054,7 +40265,7 @@
                 </a:solidFill>
                 <a:latin typeface="Aptos"/>
               </a:rPr>
-              <a:t>Nízká podpora vyučujících; obtížné zavedení</a:t>
+              <a:t>Limited instructor support; difficult to implement</a:t>
             </a:r>
           </a:p>
         </p:txBody>
@@ -41327,7 +40538,7 @@
                 </a:solidFill>
                 <a:latin typeface="Aptos"/>
               </a:rPr>
-              <a:t>16 · K</a:t>
+              <a:t>16 · C</a:t>
             </a:r>
           </a:p>
         </p:txBody>
@@ -41418,7 +40629,7 @@
                 </a:solidFill>
                 <a:latin typeface="Aptos"/>
               </a:rPr>
-              <a:t>Začít dobrovolným pilotem v jednom předmětu.</a:t>
+              <a:t>Start with a voluntary pilot in one course.</a:t>
             </a:r>
           </a:p>
         </p:txBody>
@@ -41600,25 +40811,7 @@
                 </a:solidFill>
                 <a:latin typeface="Aptos"/>
               </a:rPr>
-              <a:t>Maintain</a:t>
-            </a:r>
-            <a:r>
-              <a:rPr lang="cs-CZ" sz="869" b="1" i="0" noProof="0" dirty="0">
-                <a:solidFill>
-                  <a:srgbClr val="132A43"/>
-                </a:solidFill>
-                <a:latin typeface="Aptos"/>
-              </a:rPr>
-              <a:t> </a:t>
-            </a:r>
-            <a:r>
-              <a:rPr lang="cs-CZ" sz="869" b="1" i="0" noProof="0" dirty="0" err="1">
-                <a:solidFill>
-                  <a:srgbClr val="132A43"/>
-                </a:solidFill>
-                <a:latin typeface="Aptos"/>
-              </a:rPr>
-              <a:t>Current</a:t>
+              <a:t>Maintain Current Approach</a:t>
             </a:r>
             <a:endParaRPr lang="cs-CZ" sz="869" b="1" i="0" noProof="0" dirty="0">
               <a:solidFill>
@@ -41715,7 +40908,7 @@
                 </a:solidFill>
                 <a:latin typeface="Aptos"/>
               </a:rPr>
-              <a:t>Rizikové návyky zůstanou bez cíleného zásahu</a:t>
+              <a:t>Risky habits will remain without targeted intervention</a:t>
             </a:r>
           </a:p>
         </p:txBody>
@@ -41774,8 +40967,8 @@
         </p:nvSpPr>
         <p:spPr>
           <a:xfrm>
-            <a:off x="7964423" y="4361688"/>
-            <a:ext cx="283464" cy="548640"/>
+            <a:off x="7964423" y="4569130"/>
+            <a:ext cx="283464" cy="133755"/>
           </a:xfrm>
           <a:prstGeom prst="rect">
             <a:avLst/>
@@ -41806,7 +40999,7 @@
                 </a:solidFill>
                 <a:latin typeface="Aptos"/>
               </a:rPr>
-              <a:t>4</a:t>
+              <a:t>5</a:t>
             </a:r>
           </a:p>
         </p:txBody>
@@ -41865,8 +41058,8 @@
         </p:nvSpPr>
         <p:spPr>
           <a:xfrm>
-            <a:off x="8321040" y="4361688"/>
-            <a:ext cx="283464" cy="548640"/>
+            <a:off x="8321040" y="4569130"/>
+            <a:ext cx="283464" cy="133755"/>
           </a:xfrm>
           <a:prstGeom prst="rect">
             <a:avLst/>
@@ -41897,7 +41090,7 @@
                 </a:solidFill>
                 <a:latin typeface="Aptos"/>
               </a:rPr>
-              <a:t>4</a:t>
+              <a:t>5</a:t>
             </a:r>
           </a:p>
         </p:txBody>
@@ -41956,8 +41149,8 @@
         </p:nvSpPr>
         <p:spPr>
           <a:xfrm>
-            <a:off x="8677656" y="4361688"/>
-            <a:ext cx="548640" cy="548640"/>
+            <a:off x="8677656" y="4569130"/>
+            <a:ext cx="548640" cy="133755"/>
           </a:xfrm>
           <a:prstGeom prst="rect">
             <a:avLst/>
@@ -41982,13 +41175,22 @@
               </a:spcAft>
             </a:pPr>
             <a:r>
+              <a:rPr lang="cs-CZ" sz="869" b="1" dirty="0">
+                <a:solidFill>
+                  <a:srgbClr val="B84F4F"/>
+                </a:solidFill>
+                <a:latin typeface="Aptos"/>
+              </a:rPr>
+              <a:t>25</a:t>
+            </a:r>
+            <a:r>
               <a:rPr lang="cs-CZ" sz="869" b="1" i="0" noProof="0" dirty="0">
                 <a:solidFill>
                   <a:srgbClr val="B84F4F"/>
                 </a:solidFill>
                 <a:latin typeface="Aptos"/>
               </a:rPr>
-              <a:t>16 · K</a:t>
+              <a:t> · C</a:t>
             </a:r>
           </a:p>
         </p:txBody>
@@ -42079,25 +41281,7 @@
                 </a:solidFill>
                 <a:latin typeface="Aptos"/>
               </a:rPr>
-              <a:t>Bez intervence není cílená </a:t>
-            </a:r>
-            <a:r>
-              <a:rPr lang="cs-CZ" sz="810" b="0" i="0" noProof="0" dirty="0" err="1">
-                <a:solidFill>
-                  <a:srgbClr val="283442"/>
-                </a:solidFill>
-                <a:latin typeface="Aptos"/>
-              </a:rPr>
-              <a:t>mitigace</a:t>
-            </a:r>
-            <a:r>
-              <a:rPr lang="cs-CZ" sz="810" b="0" i="0" noProof="0" dirty="0">
-                <a:solidFill>
-                  <a:srgbClr val="283442"/>
-                </a:solidFill>
-                <a:latin typeface="Aptos"/>
-              </a:rPr>
-              <a:t>; znovu vyhodnotit.</a:t>
+              <a:t>Without an intervention, there is no targeted mitigation; reassess later.</a:t>
             </a:r>
           </a:p>
         </p:txBody>
@@ -42142,7 +41326,7 @@
                 </a:solidFill>
                 <a:latin typeface="Aptos"/>
               </a:rPr>
-              <a:t>Škála: 1 = nízká, 5 = vysoká. Kategorie: 1–4 nízké, 5–9 střední (S), 10–15 vysoké (V), 16–25 kritické (K).</a:t>
+              <a:t>Scale: 1 = low, 5 = high. Categories: 1–4 low, 5–9 medium (M), 10–15 high (H), 16–25 critical (C).</a:t>
             </a:r>
           </a:p>
         </p:txBody>
@@ -42187,25 +41371,7 @@
                 </a:solidFill>
                 <a:latin typeface="Aptos"/>
               </a:rPr>
-              <a:t>P a D jsou kvalifikované odhady týmu, ne naměřené pravděpodobnosti. Rizika po </a:t>
-            </a:r>
-            <a:r>
-              <a:rPr lang="cs-CZ" sz="840" b="0" i="0" noProof="0" dirty="0" err="1">
-                <a:solidFill>
-                  <a:srgbClr val="667585"/>
-                </a:solidFill>
-                <a:latin typeface="Aptos"/>
-              </a:rPr>
-              <a:t>mitigaci</a:t>
-            </a:r>
-            <a:r>
-              <a:rPr lang="cs-CZ" sz="840" b="0" i="0" noProof="0" dirty="0">
-                <a:solidFill>
-                  <a:srgbClr val="667585"/>
-                </a:solidFill>
-                <a:latin typeface="Aptos"/>
-              </a:rPr>
-              <a:t> zatím nejsou přepočítána.</a:t>
+              <a:t>P and I are informed team estimates, not measured probabilities. Residual risks have not yet been recalculated.</a:t>
             </a:r>
           </a:p>
         </p:txBody>
@@ -42285,7 +41451,7 @@
                 </a:solidFill>
                 <a:latin typeface="Aptos"/>
               </a:rPr>
-              <a:t>TÝM 10  ·  ŘEŠENÍ PROBLÉMŮ  ·  FIS VŠE  ·  OBSAH 8/10</a:t>
+              <a:t>TEAM 10  ·  PROBLEM SOLVING  ·  FIS, VŠE  ·  CONTENT 8/10</a:t>
             </a:r>
           </a:p>
         </p:txBody>
@@ -42330,7 +41496,7 @@
                 </a:solidFill>
                 <a:latin typeface="Aptos"/>
               </a:rPr>
-              <a:t>Skóre = P × D; týmové hodnocení.</a:t>
+              <a:t>Score = P × I; team assessment.</a:t>
             </a:r>
           </a:p>
         </p:txBody>
@@ -42349,8 +41515,8 @@
         </p:nvSpPr>
         <p:spPr>
           <a:xfrm>
-            <a:off x="3438144" y="2814870"/>
-            <a:ext cx="362712" cy="1124923"/>
+            <a:off x="3364992" y="2814870"/>
+            <a:ext cx="676656" cy="1124923"/>
           </a:xfrm>
           <a:prstGeom prst="rect">
             <a:avLst/>
@@ -42381,7 +41547,7 @@
                 </a:solidFill>
                 <a:latin typeface="Aptos"/>
               </a:rPr>
-              <a:t>D</a:t>
+              <a:t>I</a:t>
             </a:r>
           </a:p>
           <a:p>
@@ -42403,84 +41569,7 @@
                 </a:solidFill>
                 <a:latin typeface="Aptos"/>
               </a:rPr>
-              <a:t>(d</a:t>
-            </a:r>
-            <a:br>
-              <a:rPr lang="cs-CZ" sz="910" i="0" noProof="0" dirty="0">
-                <a:solidFill>
-                  <a:srgbClr val="667585"/>
-                </a:solidFill>
-                <a:latin typeface="Aptos"/>
-              </a:rPr>
-            </a:br>
-            <a:r>
-              <a:rPr lang="cs-CZ" sz="910" i="0" noProof="0" dirty="0">
-                <a:solidFill>
-                  <a:srgbClr val="667585"/>
-                </a:solidFill>
-                <a:latin typeface="Aptos"/>
-              </a:rPr>
-              <a:t>o</a:t>
-            </a:r>
-            <a:br>
-              <a:rPr lang="cs-CZ" sz="910" i="0" noProof="0" dirty="0">
-                <a:solidFill>
-                  <a:srgbClr val="667585"/>
-                </a:solidFill>
-                <a:latin typeface="Aptos"/>
-              </a:rPr>
-            </a:br>
-            <a:r>
-              <a:rPr lang="cs-CZ" sz="910" i="0" noProof="0" dirty="0">
-                <a:solidFill>
-                  <a:srgbClr val="667585"/>
-                </a:solidFill>
-                <a:latin typeface="Aptos"/>
-              </a:rPr>
-              <a:t>p</a:t>
-            </a:r>
-            <a:br>
-              <a:rPr lang="cs-CZ" sz="910" i="0" noProof="0" dirty="0">
-                <a:solidFill>
-                  <a:srgbClr val="667585"/>
-                </a:solidFill>
-                <a:latin typeface="Aptos"/>
-              </a:rPr>
-            </a:br>
-            <a:r>
-              <a:rPr lang="cs-CZ" sz="910" i="0" noProof="0" dirty="0">
-                <a:solidFill>
-                  <a:srgbClr val="667585"/>
-                </a:solidFill>
-                <a:latin typeface="Aptos"/>
-              </a:rPr>
-              <a:t>a</a:t>
-            </a:r>
-            <a:br>
-              <a:rPr lang="cs-CZ" sz="910" i="0" noProof="0" dirty="0">
-                <a:solidFill>
-                  <a:srgbClr val="667585"/>
-                </a:solidFill>
-                <a:latin typeface="Aptos"/>
-              </a:rPr>
-            </a:br>
-            <a:r>
-              <a:rPr lang="cs-CZ" sz="910" i="0" noProof="0" dirty="0">
-                <a:solidFill>
-                  <a:srgbClr val="667585"/>
-                </a:solidFill>
-                <a:latin typeface="Aptos"/>
-              </a:rPr>
-              <a:t>d) </a:t>
-            </a:r>
-            <a:r>
-              <a:rPr lang="cs-CZ" sz="910" b="1" noProof="0" dirty="0">
-                <a:solidFill>
-                  <a:srgbClr val="667585"/>
-                </a:solidFill>
-                <a:latin typeface="Aptos"/>
-              </a:rPr>
-              <a:t>↓</a:t>
+              <a:t>(impact) ↓</a:t>
             </a:r>
           </a:p>
         </p:txBody>
